--- a/projects/transnational-justice/Epstein_Transnational_Justice.pptx
+++ b/projects/transnational-justice/Epstein_Transnational_Justice.pptx
@@ -3203,9 +3203,33 @@
           </a:p>
         </p:txBody>
       </p:sp>
-      <p:sp>
-        <p:nvSpPr>
-          <p:cNvPr id="4" name="TextBox 3"/>
+      <p:pic>
+        <p:nvPicPr>
+          <p:cNvPr id="4" name="Picture 3" descr="image.png"/>
+          <p:cNvPicPr>
+            <a:picLocks noChangeAspect="1"/>
+          </p:cNvPicPr>
+          <p:nvPr/>
+        </p:nvPicPr>
+        <p:blipFill>
+          <a:blip r:embed="rId2"/>
+          <a:stretch>
+            <a:fillRect/>
+          </a:stretch>
+        </p:blipFill>
+        <p:spPr>
+          <a:xfrm>
+            <a:off x="5638647" y="868680"/>
+            <a:ext cx="914400" cy="914400"/>
+          </a:xfrm>
+          <a:prstGeom prst="rect">
+            <a:avLst/>
+          </a:prstGeom>
+        </p:spPr>
+      </p:pic>
+      <p:sp>
+        <p:nvSpPr>
+          <p:cNvPr id="5" name="TextBox 4"/>
           <p:cNvSpPr txBox="1"/>
           <p:nvPr/>
         </p:nvSpPr>
@@ -3244,7 +3268,7 @@
       </p:sp>
       <p:sp>
         <p:nvSpPr>
-          <p:cNvPr id="5" name="TextBox 4"/>
+          <p:cNvPr id="6" name="TextBox 5"/>
           <p:cNvSpPr txBox="1"/>
           <p:nvPr/>
         </p:nvSpPr>
@@ -3283,7 +3307,7 @@
       </p:sp>
       <p:sp>
         <p:nvSpPr>
-          <p:cNvPr id="6" name="Rectangle 5"/>
+          <p:cNvPr id="7" name="Rectangle 6"/>
           <p:cNvSpPr/>
           <p:nvPr/>
         </p:nvSpPr>
@@ -3327,7 +3351,7 @@
       </p:sp>
       <p:sp>
         <p:nvSpPr>
-          <p:cNvPr id="7" name="TextBox 6"/>
+          <p:cNvPr id="8" name="TextBox 7"/>
           <p:cNvSpPr txBox="1"/>
           <p:nvPr/>
         </p:nvSpPr>
@@ -3364,30 +3388,6 @@
           </a:p>
         </p:txBody>
       </p:sp>
-      <p:pic>
-        <p:nvPicPr>
-          <p:cNvPr id="8" name="Picture 7" descr="image.png"/>
-          <p:cNvPicPr>
-            <a:picLocks noChangeAspect="1"/>
-          </p:cNvPicPr>
-          <p:nvPr/>
-        </p:nvPicPr>
-        <p:blipFill>
-          <a:blip r:embed="rId2"/>
-          <a:stretch>
-            <a:fillRect/>
-          </a:stretch>
-        </p:blipFill>
-        <p:spPr>
-          <a:xfrm>
-            <a:off x="5524347" y="4526280"/>
-            <a:ext cx="1143000" cy="1143000"/>
-          </a:xfrm>
-          <a:prstGeom prst="rect">
-            <a:avLst/>
-          </a:prstGeom>
-        </p:spPr>
-      </p:pic>
       <p:sp>
         <p:nvSpPr>
           <p:cNvPr id="9" name="TextBox 8"/>
@@ -3396,7 +3396,358 @@
         </p:nvSpPr>
         <p:spPr>
           <a:xfrm>
-            <a:off x="914400" y="5989320"/>
+            <a:off x="914400" y="4828032"/>
+            <a:ext cx="10332720" cy="320040"/>
+          </a:xfrm>
+          <a:prstGeom prst="rect">
+            <a:avLst/>
+          </a:prstGeom>
+          <a:noFill/>
+        </p:spPr>
+        <p:txBody>
+          <a:bodyPr wrap="square">
+            <a:spAutoFit/>
+          </a:bodyPr>
+          <a:lstStyle/>
+          <a:p>
+            <a:pPr algn="ctr">
+              <a:lnSpc>
+                <a:spcPct val="100000"/>
+              </a:lnSpc>
+            </a:pPr>
+            <a:r>
+              <a:rPr sz="1416" b="1" i="0">
+                <a:solidFill>
+                  <a:srgbClr val="C08A2B"/>
+                </a:solidFill>
+                <a:latin typeface="Times New Roman"/>
+              </a:rPr>
+              <a:t>PRESENTED BY</a:t>
+            </a:r>
+          </a:p>
+        </p:txBody>
+      </p:sp>
+      <p:sp>
+        <p:nvSpPr>
+          <p:cNvPr id="10" name="TextBox 9"/>
+          <p:cNvSpPr txBox="1"/>
+          <p:nvPr/>
+        </p:nvSpPr>
+        <p:spPr>
+          <a:xfrm>
+            <a:off x="914400" y="5230368"/>
+            <a:ext cx="2583180" cy="347472"/>
+          </a:xfrm>
+          <a:prstGeom prst="rect">
+            <a:avLst/>
+          </a:prstGeom>
+          <a:noFill/>
+        </p:spPr>
+        <p:txBody>
+          <a:bodyPr wrap="square">
+            <a:spAutoFit/>
+          </a:bodyPr>
+          <a:lstStyle/>
+          <a:p>
+            <a:pPr algn="ctr">
+              <a:lnSpc>
+                <a:spcPct val="100000"/>
+              </a:lnSpc>
+            </a:pPr>
+            <a:r>
+              <a:rPr sz="1652" b="1" i="0">
+                <a:solidFill>
+                  <a:srgbClr val="FFFFFF"/>
+                </a:solidFill>
+                <a:latin typeface="Times New Roman"/>
+              </a:rPr>
+              <a:t>Yusuke Muteki</a:t>
+            </a:r>
+          </a:p>
+        </p:txBody>
+      </p:sp>
+      <p:sp>
+        <p:nvSpPr>
+          <p:cNvPr id="11" name="TextBox 10"/>
+          <p:cNvSpPr txBox="1"/>
+          <p:nvPr/>
+        </p:nvSpPr>
+        <p:spPr>
+          <a:xfrm>
+            <a:off x="914400" y="5596128"/>
+            <a:ext cx="2583180" cy="292608"/>
+          </a:xfrm>
+          <a:prstGeom prst="rect">
+            <a:avLst/>
+          </a:prstGeom>
+          <a:noFill/>
+        </p:spPr>
+        <p:txBody>
+          <a:bodyPr wrap="square">
+            <a:spAutoFit/>
+          </a:bodyPr>
+          <a:lstStyle/>
+          <a:p>
+            <a:pPr algn="ctr">
+              <a:lnSpc>
+                <a:spcPct val="100000"/>
+              </a:lnSpc>
+            </a:pPr>
+            <a:r>
+              <a:rPr sz="1297" b="0" i="0">
+                <a:solidFill>
+                  <a:srgbClr val="C08A2B"/>
+                </a:solidFill>
+                <a:latin typeface="Times New Roman"/>
+              </a:rPr>
+              <a:t>1120240018</a:t>
+            </a:r>
+          </a:p>
+        </p:txBody>
+      </p:sp>
+      <p:sp>
+        <p:nvSpPr>
+          <p:cNvPr id="12" name="TextBox 11"/>
+          <p:cNvSpPr txBox="1"/>
+          <p:nvPr/>
+        </p:nvSpPr>
+        <p:spPr>
+          <a:xfrm>
+            <a:off x="3497580" y="5230368"/>
+            <a:ext cx="2583180" cy="347472"/>
+          </a:xfrm>
+          <a:prstGeom prst="rect">
+            <a:avLst/>
+          </a:prstGeom>
+          <a:noFill/>
+        </p:spPr>
+        <p:txBody>
+          <a:bodyPr wrap="square">
+            <a:spAutoFit/>
+          </a:bodyPr>
+          <a:lstStyle/>
+          <a:p>
+            <a:pPr algn="ctr">
+              <a:lnSpc>
+                <a:spcPct val="100000"/>
+              </a:lnSpc>
+            </a:pPr>
+            <a:r>
+              <a:rPr sz="1652" b="1" i="0">
+                <a:solidFill>
+                  <a:srgbClr val="FFFFFF"/>
+                </a:solidFill>
+                <a:latin typeface="Times New Roman"/>
+              </a:rPr>
+              <a:t>Kai Robinson</a:t>
+            </a:r>
+          </a:p>
+        </p:txBody>
+      </p:sp>
+      <p:sp>
+        <p:nvSpPr>
+          <p:cNvPr id="13" name="TextBox 12"/>
+          <p:cNvSpPr txBox="1"/>
+          <p:nvPr/>
+        </p:nvSpPr>
+        <p:spPr>
+          <a:xfrm>
+            <a:off x="3497580" y="5596128"/>
+            <a:ext cx="2583180" cy="292608"/>
+          </a:xfrm>
+          <a:prstGeom prst="rect">
+            <a:avLst/>
+          </a:prstGeom>
+          <a:noFill/>
+        </p:spPr>
+        <p:txBody>
+          <a:bodyPr wrap="square">
+            <a:spAutoFit/>
+          </a:bodyPr>
+          <a:lstStyle/>
+          <a:p>
+            <a:pPr algn="ctr">
+              <a:lnSpc>
+                <a:spcPct val="100000"/>
+              </a:lnSpc>
+            </a:pPr>
+            <a:r>
+              <a:rPr sz="1297" b="0" i="0">
+                <a:solidFill>
+                  <a:srgbClr val="C08A2B"/>
+                </a:solidFill>
+                <a:latin typeface="Times New Roman"/>
+              </a:rPr>
+              <a:t>1120240025</a:t>
+            </a:r>
+          </a:p>
+        </p:txBody>
+      </p:sp>
+      <p:sp>
+        <p:nvSpPr>
+          <p:cNvPr id="14" name="TextBox 13"/>
+          <p:cNvSpPr txBox="1"/>
+          <p:nvPr/>
+        </p:nvSpPr>
+        <p:spPr>
+          <a:xfrm>
+            <a:off x="6080760" y="5230368"/>
+            <a:ext cx="2583180" cy="347472"/>
+          </a:xfrm>
+          <a:prstGeom prst="rect">
+            <a:avLst/>
+          </a:prstGeom>
+          <a:noFill/>
+        </p:spPr>
+        <p:txBody>
+          <a:bodyPr wrap="square">
+            <a:spAutoFit/>
+          </a:bodyPr>
+          <a:lstStyle/>
+          <a:p>
+            <a:pPr algn="ctr">
+              <a:lnSpc>
+                <a:spcPct val="100000"/>
+              </a:lnSpc>
+            </a:pPr>
+            <a:r>
+              <a:rPr sz="1652" b="1" i="0">
+                <a:solidFill>
+                  <a:srgbClr val="FFFFFF"/>
+                </a:solidFill>
+                <a:latin typeface="Times New Roman"/>
+              </a:rPr>
+              <a:t>Naoki Hayashi</a:t>
+            </a:r>
+          </a:p>
+        </p:txBody>
+      </p:sp>
+      <p:sp>
+        <p:nvSpPr>
+          <p:cNvPr id="15" name="TextBox 14"/>
+          <p:cNvSpPr txBox="1"/>
+          <p:nvPr/>
+        </p:nvSpPr>
+        <p:spPr>
+          <a:xfrm>
+            <a:off x="6080760" y="5596128"/>
+            <a:ext cx="2583180" cy="292608"/>
+          </a:xfrm>
+          <a:prstGeom prst="rect">
+            <a:avLst/>
+          </a:prstGeom>
+          <a:noFill/>
+        </p:spPr>
+        <p:txBody>
+          <a:bodyPr wrap="square">
+            <a:spAutoFit/>
+          </a:bodyPr>
+          <a:lstStyle/>
+          <a:p>
+            <a:pPr algn="ctr">
+              <a:lnSpc>
+                <a:spcPct val="100000"/>
+              </a:lnSpc>
+            </a:pPr>
+            <a:r>
+              <a:rPr sz="1297" b="0" i="0">
+                <a:solidFill>
+                  <a:srgbClr val="C08A2B"/>
+                </a:solidFill>
+                <a:latin typeface="Times New Roman"/>
+              </a:rPr>
+              <a:t>1120240007</a:t>
+            </a:r>
+          </a:p>
+        </p:txBody>
+      </p:sp>
+      <p:sp>
+        <p:nvSpPr>
+          <p:cNvPr id="16" name="TextBox 15"/>
+          <p:cNvSpPr txBox="1"/>
+          <p:nvPr/>
+        </p:nvSpPr>
+        <p:spPr>
+          <a:xfrm>
+            <a:off x="8663940" y="5230368"/>
+            <a:ext cx="2583180" cy="347472"/>
+          </a:xfrm>
+          <a:prstGeom prst="rect">
+            <a:avLst/>
+          </a:prstGeom>
+          <a:noFill/>
+        </p:spPr>
+        <p:txBody>
+          <a:bodyPr wrap="square">
+            <a:spAutoFit/>
+          </a:bodyPr>
+          <a:lstStyle/>
+          <a:p>
+            <a:pPr algn="ctr">
+              <a:lnSpc>
+                <a:spcPct val="100000"/>
+              </a:lnSpc>
+            </a:pPr>
+            <a:r>
+              <a:rPr sz="1652" b="1" i="0">
+                <a:solidFill>
+                  <a:srgbClr val="FFFFFF"/>
+                </a:solidFill>
+                <a:latin typeface="Times New Roman"/>
+              </a:rPr>
+              <a:t>Koki Kato</a:t>
+            </a:r>
+          </a:p>
+        </p:txBody>
+      </p:sp>
+      <p:sp>
+        <p:nvSpPr>
+          <p:cNvPr id="17" name="TextBox 16"/>
+          <p:cNvSpPr txBox="1"/>
+          <p:nvPr/>
+        </p:nvSpPr>
+        <p:spPr>
+          <a:xfrm>
+            <a:off x="8663940" y="5596128"/>
+            <a:ext cx="2583180" cy="292608"/>
+          </a:xfrm>
+          <a:prstGeom prst="rect">
+            <a:avLst/>
+          </a:prstGeom>
+          <a:noFill/>
+        </p:spPr>
+        <p:txBody>
+          <a:bodyPr wrap="square">
+            <a:spAutoFit/>
+          </a:bodyPr>
+          <a:lstStyle/>
+          <a:p>
+            <a:pPr algn="ctr">
+              <a:lnSpc>
+                <a:spcPct val="100000"/>
+              </a:lnSpc>
+            </a:pPr>
+            <a:r>
+              <a:rPr sz="1297" b="0" i="0">
+                <a:solidFill>
+                  <a:srgbClr val="C08A2B"/>
+                </a:solidFill>
+                <a:latin typeface="Times New Roman"/>
+              </a:rPr>
+              <a:t>1120230009</a:t>
+            </a:r>
+          </a:p>
+        </p:txBody>
+      </p:sp>
+      <p:sp>
+        <p:nvSpPr>
+          <p:cNvPr id="18" name="TextBox 17"/>
+          <p:cNvSpPr txBox="1"/>
+          <p:nvPr/>
+        </p:nvSpPr>
+        <p:spPr>
+          <a:xfrm>
+            <a:off x="914400" y="6144768"/>
             <a:ext cx="10332720" cy="731520"/>
           </a:xfrm>
           <a:prstGeom prst="rect">
@@ -10538,8 +10889,8 @@
         </p:nvSpPr>
         <p:spPr>
           <a:xfrm>
-            <a:off x="548640" y="5440680"/>
-            <a:ext cx="11091672" cy="868680"/>
+            <a:off x="548640" y="5358384"/>
+            <a:ext cx="11091672" cy="978408"/>
           </a:xfrm>
           <a:prstGeom prst="rect">
             <a:avLst/>
@@ -10582,8 +10933,8 @@
         </p:nvSpPr>
         <p:spPr>
           <a:xfrm>
-            <a:off x="548640" y="5440680"/>
-            <a:ext cx="128016" cy="868680"/>
+            <a:off x="548640" y="5358384"/>
+            <a:ext cx="128016" cy="978408"/>
           </a:xfrm>
           <a:prstGeom prst="rect">
             <a:avLst/>
@@ -10626,7 +10977,7 @@
         </p:nvSpPr>
         <p:spPr>
           <a:xfrm>
-            <a:off x="777240" y="5559552"/>
+            <a:off x="777240" y="5477256"/>
             <a:ext cx="10607040" cy="731520"/>
           </a:xfrm>
           <a:prstGeom prst="rect">
@@ -10665,8 +11016,8 @@
         </p:nvSpPr>
         <p:spPr>
           <a:xfrm>
-            <a:off x="777240" y="5852160"/>
-            <a:ext cx="10698480" cy="502920"/>
+            <a:off x="777240" y="5788152"/>
+            <a:ext cx="10698480" cy="548640"/>
           </a:xfrm>
           <a:prstGeom prst="rect">
             <a:avLst/>
@@ -10681,17 +11032,17 @@
           <a:p>
             <a:pPr algn="l">
               <a:lnSpc>
-                <a:spcPct val="115000"/>
-              </a:lnSpc>
-            </a:pPr>
-            <a:r>
-              <a:rPr sz="1297" b="0" i="0">
+                <a:spcPct val="112000"/>
+              </a:lnSpc>
+            </a:pPr>
+            <a:r>
+              <a:rPr sz="1238" b="0" i="0">
                 <a:solidFill>
                   <a:srgbClr val="334455"/>
                 </a:solidFill>
                 <a:latin typeface="Times New Roman"/>
               </a:rPr>
-              <a:t>Palermo Protocol (2000) · UN Convention against Transnational Organized Crime · US DOJ filings (US v. Epstein 2019; US v. Maxwell 2021) · US State Dept. Trafficking in Persons Reports · contemporary reporting on 2025 disclosures.</a:t>
+              <a:t>Palermo Protocol (2000) · UN Convention against Transnational Organized Crime (UNTOC) · US DOJ filings (US v. Epstein, 2019; US v. Maxwell, 2021) · US State Dept. TIP Reports · contemporary reporting on the 2025 disclosures.</a:t>
             </a:r>
           </a:p>
         </p:txBody>
@@ -11352,7 +11703,7 @@
         </p:nvSpPr>
         <p:spPr>
           <a:xfrm>
-            <a:off x="640080" y="1783080"/>
+            <a:off x="640080" y="1691640"/>
             <a:ext cx="6766560" cy="4572000"/>
           </a:xfrm>
           <a:prstGeom prst="rect">
@@ -11371,7 +11722,7 @@
                 <a:spcPct val="105000"/>
               </a:lnSpc>
               <a:spcAft>
-                <a:spcPts val="2600"/>
+                <a:spcPts val="1400"/>
               </a:spcAft>
             </a:pPr>
             <a:r>
@@ -11381,7 +11732,7 @@
                 </a:solidFill>
                 <a:latin typeface="Times New Roman"/>
               </a:rPr>
-              <a:t>•  A US financier who built extraordinary wealth and a network of powerful international contacts.</a:t>
+              <a:t>•  A US financier who built vast wealth and a network of powerful international contacts.</a:t>
             </a:r>
           </a:p>
           <a:p>
@@ -11390,7 +11741,7 @@
                 <a:spcPct val="105000"/>
               </a:lnSpc>
               <a:spcAft>
-                <a:spcPts val="2600"/>
+                <a:spcPts val="1400"/>
               </a:spcAft>
             </a:pPr>
             <a:r>
@@ -11418,7 +11769,7 @@
                 <a:spcPct val="105000"/>
               </a:lnSpc>
               <a:spcAft>
-                <a:spcPts val="2600"/>
+                <a:spcPts val="1400"/>
               </a:spcAft>
             </a:pPr>
             <a:r>
@@ -11446,7 +11797,7 @@
                 <a:spcPct val="105000"/>
               </a:lnSpc>
               <a:spcAft>
-                <a:spcPts val="2600"/>
+                <a:spcPts val="1400"/>
               </a:spcAft>
             </a:pPr>
             <a:r>
@@ -11474,7 +11825,7 @@
                 <a:spcPct val="105000"/>
               </a:lnSpc>
               <a:spcAft>
-                <a:spcPts val="2600"/>
+                <a:spcPts val="1400"/>
               </a:spcAft>
             </a:pPr>
             <a:r>
@@ -11484,7 +11835,7 @@
                 </a:solidFill>
                 <a:latin typeface="Times New Roman"/>
               </a:rPr>
-              <a:t>•  Died in custody in August 2019 (ruled a suicide) — ending the criminal case against him.</a:t>
+              <a:t>•  Died in custody in August 2019 (ruled a suicide), ending the criminal case.</a:t>
             </a:r>
           </a:p>
         </p:txBody>
@@ -11650,7 +12001,7 @@
                 </a:solidFill>
                 <a:latin typeface="Times New Roman"/>
               </a:rPr>
-              <a:t>His death meant accountability had to be pursued through others — and across borders. The case became a test of how legal systems cooperate.</a:t>
+              <a:t>His 2019 death in custody ended any criminal trial of Epstein himself. Accountability could then be pursued only through others — and across borders — making the case a test of how well national legal systems cooperate.</a:t>
             </a:r>
           </a:p>
         </p:txBody>

--- a/projects/transnational-justice/Epstein_Transnational_Justice.pptx
+++ b/projects/transnational-justice/Epstein_Transnational_Justice.pptx
@@ -11703,7 +11703,7 @@
         </p:nvSpPr>
         <p:spPr>
           <a:xfrm>
-            <a:off x="640080" y="1691640"/>
+            <a:off x="640080" y="1664208"/>
             <a:ext cx="6766560" cy="4572000"/>
           </a:xfrm>
           <a:prstGeom prst="rect">
@@ -11722,7 +11722,7 @@
                 <a:spcPct val="105000"/>
               </a:lnSpc>
               <a:spcAft>
-                <a:spcPts val="1400"/>
+                <a:spcPts val="1200"/>
               </a:spcAft>
             </a:pPr>
             <a:r>
@@ -11741,7 +11741,7 @@
                 <a:spcPct val="105000"/>
               </a:lnSpc>
               <a:spcAft>
-                <a:spcPts val="1400"/>
+                <a:spcPts val="1200"/>
               </a:spcAft>
             </a:pPr>
             <a:r>
@@ -11769,7 +11769,7 @@
                 <a:spcPct val="105000"/>
               </a:lnSpc>
               <a:spcAft>
-                <a:spcPts val="1400"/>
+                <a:spcPts val="1200"/>
               </a:spcAft>
             </a:pPr>
             <a:r>
@@ -11797,7 +11797,7 @@
                 <a:spcPct val="105000"/>
               </a:lnSpc>
               <a:spcAft>
-                <a:spcPts val="1400"/>
+                <a:spcPts val="1200"/>
               </a:spcAft>
             </a:pPr>
             <a:r>
@@ -11825,7 +11825,7 @@
                 <a:spcPct val="105000"/>
               </a:lnSpc>
               <a:spcAft>
-                <a:spcPts val="1400"/>
+                <a:spcPts val="1200"/>
               </a:spcAft>
             </a:pPr>
             <a:r>
@@ -11975,8 +11975,8 @@
         </p:nvSpPr>
         <p:spPr>
           <a:xfrm>
-            <a:off x="8001000" y="2331720"/>
-            <a:ext cx="3474720" cy="3017520"/>
+            <a:off x="8001000" y="2212848"/>
+            <a:ext cx="3474720" cy="1051560"/>
           </a:xfrm>
           <a:prstGeom prst="rect">
             <a:avLst/>
@@ -11995,13 +11995,13 @@
               </a:lnSpc>
             </a:pPr>
             <a:r>
-              <a:rPr sz="1888" b="0" i="1">
+              <a:rPr sz="1770" b="0" i="1">
                 <a:solidFill>
                   <a:srgbClr val="334455"/>
                 </a:solidFill>
                 <a:latin typeface="Times New Roman"/>
               </a:rPr>
-              <a:t>His 2019 death in custody ended any criminal trial of Epstein himself. Accountability could then be pursued only through others — and across borders — making the case a test of how well national legal systems cooperate.</a:t>
+              <a:t>His death meant accountability had to be pursued through others — and across borders.</a:t>
             </a:r>
           </a:p>
         </p:txBody>
@@ -12009,6 +12009,74 @@
       <p:sp>
         <p:nvSpPr>
           <p:cNvPr id="12" name="Rectangle 11"/>
+          <p:cNvSpPr/>
+          <p:nvPr/>
+        </p:nvSpPr>
+        <p:spPr>
+          <a:xfrm>
+            <a:off x="7973568" y="3282696"/>
+            <a:ext cx="3419856" cy="2221992"/>
+          </a:xfrm>
+          <a:prstGeom prst="rect">
+            <a:avLst/>
+          </a:prstGeom>
+          <a:solidFill>
+            <a:srgbClr val="C08A2B"/>
+          </a:solidFill>
+          <a:ln>
+            <a:noFill/>
+          </a:ln>
+          <a:effectLst/>
+        </p:spPr>
+        <p:style>
+          <a:lnRef idx="1">
+            <a:schemeClr val="accent1"/>
+          </a:lnRef>
+          <a:fillRef idx="3">
+            <a:schemeClr val="accent1"/>
+          </a:fillRef>
+          <a:effectRef idx="2">
+            <a:schemeClr val="accent1"/>
+          </a:effectRef>
+          <a:fontRef idx="minor">
+            <a:schemeClr val="lt1"/>
+          </a:fontRef>
+        </p:style>
+        <p:txBody>
+          <a:bodyPr rtlCol="0" anchor="ctr"/>
+          <a:lstStyle/>
+          <a:p>
+            <a:pPr algn="ctr"/>
+          </a:p>
+        </p:txBody>
+      </p:sp>
+      <p:pic>
+        <p:nvPicPr>
+          <p:cNvPr id="13" name="Picture 12" descr="image.jpg"/>
+          <p:cNvPicPr>
+            <a:picLocks noChangeAspect="1"/>
+          </p:cNvPicPr>
+          <p:nvPr/>
+        </p:nvPicPr>
+        <p:blipFill>
+          <a:blip r:embed="rId3"/>
+          <a:stretch>
+            <a:fillRect/>
+          </a:stretch>
+        </p:blipFill>
+        <p:spPr>
+          <a:xfrm>
+            <a:off x="8001000" y="3310128"/>
+            <a:ext cx="3364992" cy="2167128"/>
+          </a:xfrm>
+          <a:prstGeom prst="rect">
+            <a:avLst/>
+          </a:prstGeom>
+        </p:spPr>
+      </p:pic>
+      <p:sp>
+        <p:nvSpPr>
+          <p:cNvPr id="14" name="Rectangle 13"/>
           <p:cNvSpPr/>
           <p:nvPr/>
         </p:nvSpPr>
@@ -12052,7 +12120,7 @@
       </p:sp>
       <p:sp>
         <p:nvSpPr>
-          <p:cNvPr id="13" name="Rectangle 12"/>
+          <p:cNvPr id="15" name="Rectangle 14"/>
           <p:cNvSpPr/>
           <p:nvPr/>
         </p:nvSpPr>
@@ -12096,7 +12164,7 @@
       </p:sp>
       <p:sp>
         <p:nvSpPr>
-          <p:cNvPr id="14" name="TextBox 13"/>
+          <p:cNvPr id="16" name="TextBox 15"/>
           <p:cNvSpPr txBox="1"/>
           <p:nvPr/>
         </p:nvSpPr>
@@ -12135,7 +12203,7 @@
       </p:sp>
       <p:sp>
         <p:nvSpPr>
-          <p:cNvPr id="15" name="Rectangle 14"/>
+          <p:cNvPr id="17" name="Rectangle 16"/>
           <p:cNvSpPr/>
           <p:nvPr/>
         </p:nvSpPr>
@@ -12179,7 +12247,7 @@
       </p:sp>
       <p:sp>
         <p:nvSpPr>
-          <p:cNvPr id="16" name="TextBox 15"/>
+          <p:cNvPr id="18" name="TextBox 17"/>
           <p:cNvSpPr txBox="1"/>
           <p:nvPr/>
         </p:nvSpPr>
@@ -13574,7 +13642,7 @@
         </p:nvSpPr>
         <p:spPr>
           <a:xfrm>
-            <a:off x="640080" y="1783080"/>
+            <a:off x="640080" y="1664208"/>
             <a:ext cx="6766560" cy="4572000"/>
           </a:xfrm>
           <a:prstGeom prst="rect">
@@ -13593,7 +13661,7 @@
                 <a:spcPct val="105000"/>
               </a:lnSpc>
               <a:spcAft>
-                <a:spcPts val="2600"/>
+                <a:spcPts val="1200"/>
               </a:spcAft>
             </a:pPr>
             <a:r>
@@ -13621,7 +13689,7 @@
                 <a:spcPct val="105000"/>
               </a:lnSpc>
               <a:spcAft>
-                <a:spcPts val="2600"/>
+                <a:spcPts val="1200"/>
               </a:spcAft>
             </a:pPr>
             <a:r>
@@ -13649,7 +13717,7 @@
                 <a:spcPct val="105000"/>
               </a:lnSpc>
               <a:spcAft>
-                <a:spcPts val="2600"/>
+                <a:spcPts val="1200"/>
               </a:spcAft>
             </a:pPr>
             <a:r>
@@ -13677,7 +13745,7 @@
                 <a:spcPct val="105000"/>
               </a:lnSpc>
               <a:spcAft>
-                <a:spcPts val="2600"/>
+                <a:spcPts val="1200"/>
               </a:spcAft>
             </a:pPr>
             <a:r>
@@ -13705,7 +13773,7 @@
                 <a:spcPct val="105000"/>
               </a:lnSpc>
               <a:spcAft>
-                <a:spcPts val="2600"/>
+                <a:spcPts val="1200"/>
               </a:spcAft>
             </a:pPr>
             <a:r>
@@ -13856,16 +13924,40 @@
           </a:p>
         </p:txBody>
       </p:sp>
-      <p:sp>
-        <p:nvSpPr>
-          <p:cNvPr id="11" name="TextBox 10"/>
+      <p:pic>
+        <p:nvPicPr>
+          <p:cNvPr id="11" name="Picture 10" descr="image.png"/>
+          <p:cNvPicPr>
+            <a:picLocks noChangeAspect="1"/>
+          </p:cNvPicPr>
+          <p:nvPr/>
+        </p:nvPicPr>
+        <p:blipFill>
+          <a:blip r:embed="rId3"/>
+          <a:stretch>
+            <a:fillRect/>
+          </a:stretch>
+        </p:blipFill>
+        <p:spPr>
+          <a:xfrm>
+            <a:off x="8001000" y="2240280"/>
+            <a:ext cx="3364992" cy="1627632"/>
+          </a:xfrm>
+          <a:prstGeom prst="rect">
+            <a:avLst/>
+          </a:prstGeom>
+        </p:spPr>
+      </p:pic>
+      <p:sp>
+        <p:nvSpPr>
+          <p:cNvPr id="12" name="TextBox 11"/>
           <p:cNvSpPr txBox="1"/>
           <p:nvPr/>
         </p:nvSpPr>
         <p:spPr>
           <a:xfrm>
-            <a:off x="8001000" y="2331720"/>
-            <a:ext cx="3474720" cy="3017520"/>
+            <a:off x="8001000" y="4069080"/>
+            <a:ext cx="3474720" cy="1371600"/>
           </a:xfrm>
           <a:prstGeom prst="rect">
             <a:avLst/>
@@ -13884,20 +13976,20 @@
               </a:lnSpc>
             </a:pPr>
             <a:r>
-              <a:rPr sz="1888" b="0" i="1">
+              <a:rPr sz="1770" b="0" i="1">
                 <a:solidFill>
                   <a:srgbClr val="334455"/>
                 </a:solidFill>
                 <a:latin typeface="Times New Roman"/>
               </a:rPr>
-              <a:t>The network was global, but criminal enforcement is national. That gap is the heart of our presentation.</a:t>
-            </a:r>
-          </a:p>
-        </p:txBody>
-      </p:sp>
-      <p:sp>
-        <p:nvSpPr>
-          <p:cNvPr id="12" name="Rectangle 11"/>
+              <a:t>The network was global; enforcement is national. That gap is the heart of this case.</a:t>
+            </a:r>
+          </a:p>
+        </p:txBody>
+      </p:sp>
+      <p:sp>
+        <p:nvSpPr>
+          <p:cNvPr id="13" name="Rectangle 12"/>
           <p:cNvSpPr/>
           <p:nvPr/>
         </p:nvSpPr>
@@ -13941,7 +14033,7 @@
       </p:sp>
       <p:sp>
         <p:nvSpPr>
-          <p:cNvPr id="13" name="Rectangle 12"/>
+          <p:cNvPr id="14" name="Rectangle 13"/>
           <p:cNvSpPr/>
           <p:nvPr/>
         </p:nvSpPr>
@@ -13985,7 +14077,7 @@
       </p:sp>
       <p:sp>
         <p:nvSpPr>
-          <p:cNvPr id="14" name="TextBox 13"/>
+          <p:cNvPr id="15" name="TextBox 14"/>
           <p:cNvSpPr txBox="1"/>
           <p:nvPr/>
         </p:nvSpPr>
@@ -14024,7 +14116,7 @@
       </p:sp>
       <p:sp>
         <p:nvSpPr>
-          <p:cNvPr id="15" name="Rectangle 14"/>
+          <p:cNvPr id="16" name="Rectangle 15"/>
           <p:cNvSpPr/>
           <p:nvPr/>
         </p:nvSpPr>
@@ -14068,7 +14160,7 @@
       </p:sp>
       <p:sp>
         <p:nvSpPr>
-          <p:cNvPr id="16" name="TextBox 15"/>
+          <p:cNvPr id="17" name="TextBox 16"/>
           <p:cNvSpPr txBox="1"/>
           <p:nvPr/>
         </p:nvSpPr>

--- a/projects/transnational-justice/Epstein_Transnational_Justice.pptx
+++ b/projects/transnational-justice/Epstein_Transnational_Justice.pptx
@@ -4003,7 +4003,7 @@
         <p:spPr>
           <a:xfrm>
             <a:off x="640080" y="1874519"/>
-            <a:ext cx="10881360" cy="4572000"/>
+            <a:ext cx="6766560" cy="4572000"/>
           </a:xfrm>
           <a:prstGeom prst="rect">
             <a:avLst/>
@@ -4021,26 +4021,17 @@
                 <a:spcPct val="105000"/>
               </a:lnSpc>
               <a:spcAft>
-                <a:spcPts val="2800"/>
+                <a:spcPts val="2000"/>
               </a:spcAft>
             </a:pPr>
             <a:r>
-              <a:rPr sz="2242" b="1">
-                <a:solidFill>
-                  <a:srgbClr val="0F2A43"/>
-                </a:solidFill>
-                <a:latin typeface="Times New Roman"/>
-              </a:rPr>
-              <a:t>•  Parent treaty: </a:t>
-            </a:r>
-            <a:r>
-              <a:rPr sz="2242">
+              <a:rPr sz="2005">
                 <a:solidFill>
                   <a:srgbClr val="334455"/>
                 </a:solidFill>
                 <a:latin typeface="Times New Roman"/>
               </a:rPr>
-              <a:t>the UN Convention against Transnational Organized Crime.</a:t>
+              <a:t>•  Parent treaty: the UN Convention against Transnational Organized Crime.</a:t>
             </a:r>
           </a:p>
           <a:p>
@@ -4049,11 +4040,11 @@
                 <a:spcPct val="105000"/>
               </a:lnSpc>
               <a:spcAft>
-                <a:spcPts val="2800"/>
+                <a:spcPts val="2000"/>
               </a:spcAft>
             </a:pPr>
             <a:r>
-              <a:rPr sz="2242">
+              <a:rPr sz="2005">
                 <a:solidFill>
                   <a:srgbClr val="334455"/>
                 </a:solidFill>
@@ -4068,17 +4059,17 @@
                 <a:spcPct val="105000"/>
               </a:lnSpc>
               <a:spcAft>
-                <a:spcPts val="2800"/>
+                <a:spcPts val="2000"/>
               </a:spcAft>
             </a:pPr>
             <a:r>
-              <a:rPr sz="2242">
+              <a:rPr sz="2005">
                 <a:solidFill>
                   <a:srgbClr val="334455"/>
                 </a:solidFill>
                 <a:latin typeface="Times New Roman"/>
               </a:rPr>
-              <a:t>•  Provides a framework for extradition, mutual legal assistance and joint investigations.</a:t>
+              <a:t>•  A framework for extradition, mutual legal assistance and joint investigations.</a:t>
             </a:r>
           </a:p>
           <a:p>
@@ -4087,36 +4078,17 @@
                 <a:spcPct val="105000"/>
               </a:lnSpc>
               <a:spcAft>
-                <a:spcPts val="2800"/>
+                <a:spcPts val="2000"/>
               </a:spcAft>
             </a:pPr>
             <a:r>
-              <a:rPr sz="2242">
+              <a:rPr sz="2005">
                 <a:solidFill>
                   <a:srgbClr val="334455"/>
                 </a:solidFill>
                 <a:latin typeface="Times New Roman"/>
               </a:rPr>
-              <a:t>•  Can serve as a legal basis for cooperation even where no bilateral treaty exists.</a:t>
-            </a:r>
-          </a:p>
-          <a:p>
-            <a:pPr>
-              <a:lnSpc>
-                <a:spcPct val="105000"/>
-              </a:lnSpc>
-              <a:spcAft>
-                <a:spcPts val="2800"/>
-              </a:spcAft>
-            </a:pPr>
-            <a:r>
-              <a:rPr sz="2242">
-                <a:solidFill>
-                  <a:srgbClr val="334455"/>
-                </a:solidFill>
-                <a:latin typeface="Times New Roman"/>
-              </a:rPr>
-              <a:t>•  Encourages asset confiscation and protection of victims and witnesses.</a:t>
+              <a:t>•  Can be the legal basis for cooperation even with no bilateral treaty.</a:t>
             </a:r>
           </a:p>
         </p:txBody>
@@ -4129,8 +4101,8 @@
         </p:nvSpPr>
         <p:spPr>
           <a:xfrm>
-            <a:off x="0" y="5779008"/>
-            <a:ext cx="12191695" cy="566928"/>
+            <a:off x="7726679" y="1600200"/>
+            <a:ext cx="3913632" cy="3977639"/>
           </a:xfrm>
           <a:prstGeom prst="rect">
             <a:avLst/>
@@ -4173,8 +4145,8 @@
         </p:nvSpPr>
         <p:spPr>
           <a:xfrm>
-            <a:off x="0" y="5779008"/>
-            <a:ext cx="128016" cy="566928"/>
+            <a:off x="7726679" y="1600200"/>
+            <a:ext cx="128016" cy="3977639"/>
           </a:xfrm>
           <a:prstGeom prst="rect">
             <a:avLst/>
@@ -4209,45 +4181,30 @@
           </a:p>
         </p:txBody>
       </p:sp>
-      <p:sp>
-        <p:nvSpPr>
-          <p:cNvPr id="10" name="TextBox 9"/>
-          <p:cNvSpPr txBox="1"/>
-          <p:nvPr/>
-        </p:nvSpPr>
-        <p:spPr>
-          <a:xfrm>
-            <a:off x="566928" y="5916168"/>
-            <a:ext cx="11064240" cy="457200"/>
-          </a:xfrm>
-          <a:prstGeom prst="rect">
-            <a:avLst/>
-          </a:prstGeom>
-          <a:noFill/>
-        </p:spPr>
-        <p:txBody>
-          <a:bodyPr wrap="square">
-            <a:spAutoFit/>
-          </a:bodyPr>
-          <a:lstStyle/>
-          <a:p>
-            <a:pPr algn="l">
-              <a:lnSpc>
-                <a:spcPct val="100000"/>
-              </a:lnSpc>
-            </a:pPr>
-            <a:r>
-              <a:rPr sz="1770" b="0" i="1">
-                <a:solidFill>
-                  <a:srgbClr val="0F2A43"/>
-                </a:solidFill>
-                <a:latin typeface="Times New Roman"/>
-              </a:rPr>
-              <a:t>In short: the machinery for international cooperation already exists on paper.</a:t>
-            </a:r>
-          </a:p>
-        </p:txBody>
-      </p:sp>
+      <p:pic>
+        <p:nvPicPr>
+          <p:cNvPr id="10" name="Picture 9" descr="image.png"/>
+          <p:cNvPicPr>
+            <a:picLocks noChangeAspect="1"/>
+          </p:cNvPicPr>
+          <p:nvPr/>
+        </p:nvPicPr>
+        <p:blipFill>
+          <a:blip r:embed="rId3"/>
+          <a:stretch>
+            <a:fillRect/>
+          </a:stretch>
+        </p:blipFill>
+        <p:spPr>
+          <a:xfrm>
+            <a:off x="7987283" y="1828799"/>
+            <a:ext cx="3520440" cy="3520440"/>
+          </a:xfrm>
+          <a:prstGeom prst="rect">
+            <a:avLst/>
+          </a:prstGeom>
+        </p:spPr>
+      </p:pic>
       <p:sp>
         <p:nvSpPr>
           <p:cNvPr id="11" name="Rectangle 10"/>
@@ -4256,8 +4213,52 @@
         </p:nvSpPr>
         <p:spPr>
           <a:xfrm>
-            <a:off x="548640" y="6583680"/>
-            <a:ext cx="411480" cy="32004"/>
+            <a:off x="0" y="5779008"/>
+            <a:ext cx="12191695" cy="566928"/>
+          </a:xfrm>
+          <a:prstGeom prst="rect">
+            <a:avLst/>
+          </a:prstGeom>
+          <a:solidFill>
+            <a:srgbClr val="F2F4F7"/>
+          </a:solidFill>
+          <a:ln>
+            <a:noFill/>
+          </a:ln>
+          <a:effectLst/>
+        </p:spPr>
+        <p:style>
+          <a:lnRef idx="1">
+            <a:schemeClr val="accent1"/>
+          </a:lnRef>
+          <a:fillRef idx="3">
+            <a:schemeClr val="accent1"/>
+          </a:fillRef>
+          <a:effectRef idx="2">
+            <a:schemeClr val="accent1"/>
+          </a:effectRef>
+          <a:fontRef idx="minor">
+            <a:schemeClr val="lt1"/>
+          </a:fontRef>
+        </p:style>
+        <p:txBody>
+          <a:bodyPr rtlCol="0" anchor="ctr"/>
+          <a:lstStyle/>
+          <a:p>
+            <a:pPr algn="ctr"/>
+          </a:p>
+        </p:txBody>
+      </p:sp>
+      <p:sp>
+        <p:nvSpPr>
+          <p:cNvPr id="12" name="Rectangle 11"/>
+          <p:cNvSpPr/>
+          <p:nvPr/>
+        </p:nvSpPr>
+        <p:spPr>
+          <a:xfrm>
+            <a:off x="0" y="5779008"/>
+            <a:ext cx="128016" cy="566928"/>
           </a:xfrm>
           <a:prstGeom prst="rect">
             <a:avLst/>
@@ -4294,7 +4295,90 @@
       </p:sp>
       <p:sp>
         <p:nvSpPr>
-          <p:cNvPr id="12" name="TextBox 11"/>
+          <p:cNvPr id="13" name="TextBox 12"/>
+          <p:cNvSpPr txBox="1"/>
+          <p:nvPr/>
+        </p:nvSpPr>
+        <p:spPr>
+          <a:xfrm>
+            <a:off x="566928" y="5916168"/>
+            <a:ext cx="11064240" cy="457200"/>
+          </a:xfrm>
+          <a:prstGeom prst="rect">
+            <a:avLst/>
+          </a:prstGeom>
+          <a:noFill/>
+        </p:spPr>
+        <p:txBody>
+          <a:bodyPr wrap="square">
+            <a:spAutoFit/>
+          </a:bodyPr>
+          <a:lstStyle/>
+          <a:p>
+            <a:pPr algn="l">
+              <a:lnSpc>
+                <a:spcPct val="100000"/>
+              </a:lnSpc>
+            </a:pPr>
+            <a:r>
+              <a:rPr sz="1770" b="0" i="1">
+                <a:solidFill>
+                  <a:srgbClr val="0F2A43"/>
+                </a:solidFill>
+                <a:latin typeface="Times New Roman"/>
+              </a:rPr>
+              <a:t>In short: the machinery for international cooperation already exists on paper.</a:t>
+            </a:r>
+          </a:p>
+        </p:txBody>
+      </p:sp>
+      <p:sp>
+        <p:nvSpPr>
+          <p:cNvPr id="14" name="Rectangle 13"/>
+          <p:cNvSpPr/>
+          <p:nvPr/>
+        </p:nvSpPr>
+        <p:spPr>
+          <a:xfrm>
+            <a:off x="548640" y="6583680"/>
+            <a:ext cx="411480" cy="32004"/>
+          </a:xfrm>
+          <a:prstGeom prst="rect">
+            <a:avLst/>
+          </a:prstGeom>
+          <a:solidFill>
+            <a:srgbClr val="C08A2B"/>
+          </a:solidFill>
+          <a:ln>
+            <a:noFill/>
+          </a:ln>
+          <a:effectLst/>
+        </p:spPr>
+        <p:style>
+          <a:lnRef idx="1">
+            <a:schemeClr val="accent1"/>
+          </a:lnRef>
+          <a:fillRef idx="3">
+            <a:schemeClr val="accent1"/>
+          </a:fillRef>
+          <a:effectRef idx="2">
+            <a:schemeClr val="accent1"/>
+          </a:effectRef>
+          <a:fontRef idx="minor">
+            <a:schemeClr val="lt1"/>
+          </a:fontRef>
+        </p:style>
+        <p:txBody>
+          <a:bodyPr rtlCol="0" anchor="ctr"/>
+          <a:lstStyle/>
+          <a:p>
+            <a:pPr algn="ctr"/>
+          </a:p>
+        </p:txBody>
+      </p:sp>
+      <p:sp>
+        <p:nvSpPr>
+          <p:cNvPr id="15" name="TextBox 14"/>
           <p:cNvSpPr txBox="1"/>
           <p:nvPr/>
         </p:nvSpPr>
@@ -4556,7 +4640,7 @@
         <p:spPr>
           <a:xfrm>
             <a:off x="640080" y="1874519"/>
-            <a:ext cx="10881360" cy="4572000"/>
+            <a:ext cx="6766560" cy="4572000"/>
           </a:xfrm>
           <a:prstGeom prst="rect">
             <a:avLst/>
@@ -4574,26 +4658,17 @@
                 <a:spcPct val="105000"/>
               </a:lnSpc>
               <a:spcAft>
-                <a:spcPts val="2800"/>
+                <a:spcPts val="2000"/>
               </a:spcAft>
             </a:pPr>
             <a:r>
-              <a:rPr sz="2242" b="1">
-                <a:solidFill>
-                  <a:srgbClr val="0F2A43"/>
-                </a:solidFill>
-                <a:latin typeface="Times New Roman"/>
-              </a:rPr>
-              <a:t>•  Jurisdiction: </a:t>
-            </a:r>
-            <a:r>
-              <a:rPr sz="2242">
+              <a:rPr sz="2005">
                 <a:solidFill>
                   <a:srgbClr val="334455"/>
                 </a:solidFill>
                 <a:latin typeface="Times New Roman"/>
               </a:rPr>
-              <a:t>states may claim it by territory or by nationality of offender/victim.</a:t>
+              <a:t>•  Jurisdiction: claimed by territory, or by nationality of offender/victim.</a:t>
             </a:r>
           </a:p>
           <a:p>
@@ -4602,26 +4677,17 @@
                 <a:spcPct val="105000"/>
               </a:lnSpc>
               <a:spcAft>
-                <a:spcPts val="2800"/>
+                <a:spcPts val="2000"/>
               </a:spcAft>
             </a:pPr>
             <a:r>
-              <a:rPr sz="2242" b="1">
-                <a:solidFill>
-                  <a:srgbClr val="0F2A43"/>
-                </a:solidFill>
-                <a:latin typeface="Times New Roman"/>
-              </a:rPr>
-              <a:t>•  Concurrent claims: </a:t>
-            </a:r>
-            <a:r>
-              <a:rPr sz="2242">
+              <a:rPr sz="2005">
                 <a:solidFill>
                   <a:srgbClr val="334455"/>
                 </a:solidFill>
                 <a:latin typeface="Times New Roman"/>
               </a:rPr>
-              <a:t>several states may have a right to prosecute the same conduct.</a:t>
+              <a:t>•  Several states may have a concurrent right to prosecute.</a:t>
             </a:r>
           </a:p>
           <a:p>
@@ -4630,26 +4696,17 @@
                 <a:spcPct val="105000"/>
               </a:lnSpc>
               <a:spcAft>
-                <a:spcPts val="2800"/>
+                <a:spcPts val="2000"/>
               </a:spcAft>
             </a:pPr>
             <a:r>
-              <a:rPr sz="2242" b="1">
-                <a:solidFill>
-                  <a:srgbClr val="0F2A43"/>
-                </a:solidFill>
-                <a:latin typeface="Times New Roman"/>
-              </a:rPr>
-              <a:t>•  Extradition: </a:t>
-            </a:r>
-            <a:r>
-              <a:rPr sz="2242">
+              <a:rPr sz="2005">
                 <a:solidFill>
                   <a:srgbClr val="334455"/>
                 </a:solidFill>
                 <a:latin typeface="Times New Roman"/>
               </a:rPr>
-              <a:t>typically needs a treaty plus "dual criminality" (an offence in both states).</a:t>
+              <a:t>•  Extradition needs a treaty plus "dual criminality."</a:t>
             </a:r>
           </a:p>
           <a:p>
@@ -4658,54 +4715,17 @@
                 <a:spcPct val="105000"/>
               </a:lnSpc>
               <a:spcAft>
-                <a:spcPts val="2800"/>
+                <a:spcPts val="2000"/>
               </a:spcAft>
             </a:pPr>
             <a:r>
-              <a:rPr sz="2242" b="1">
-                <a:solidFill>
-                  <a:srgbClr val="0F2A43"/>
-                </a:solidFill>
-                <a:latin typeface="Times New Roman"/>
-              </a:rPr>
-              <a:t>•  MLATs: </a:t>
-            </a:r>
-            <a:r>
-              <a:rPr sz="2242">
+              <a:rPr sz="2005">
                 <a:solidFill>
                   <a:srgbClr val="334455"/>
                 </a:solidFill>
                 <a:latin typeface="Times New Roman"/>
               </a:rPr>
-              <a:t>Mutual Legal Assistance Treaties move evidence, testimony and records across borders.</a:t>
-            </a:r>
-          </a:p>
-          <a:p>
-            <a:pPr>
-              <a:lnSpc>
-                <a:spcPct val="105000"/>
-              </a:lnSpc>
-              <a:spcAft>
-                <a:spcPts val="2800"/>
-              </a:spcAft>
-            </a:pPr>
-            <a:r>
-              <a:rPr sz="2242" b="1">
-                <a:solidFill>
-                  <a:srgbClr val="0F2A43"/>
-                </a:solidFill>
-                <a:latin typeface="Times New Roman"/>
-              </a:rPr>
-              <a:t>•  The friction: </a:t>
-            </a:r>
-            <a:r>
-              <a:rPr sz="2242">
-                <a:solidFill>
-                  <a:srgbClr val="334455"/>
-                </a:solidFill>
-                <a:latin typeface="Times New Roman"/>
-              </a:rPr>
-              <a:t>requests are slow, can be refused, and stall when suspects are wealthy or well-connected.</a:t>
+              <a:t>•  MLATs move evidence and testimony across borders — but slowly.</a:t>
             </a:r>
           </a:p>
         </p:txBody>
@@ -4718,8 +4738,8 @@
         </p:nvSpPr>
         <p:spPr>
           <a:xfrm>
-            <a:off x="0" y="5779008"/>
-            <a:ext cx="12191695" cy="566928"/>
+            <a:off x="7726679" y="1600200"/>
+            <a:ext cx="3913632" cy="3977639"/>
           </a:xfrm>
           <a:prstGeom prst="rect">
             <a:avLst/>
@@ -4762,8 +4782,8 @@
         </p:nvSpPr>
         <p:spPr>
           <a:xfrm>
-            <a:off x="0" y="5779008"/>
-            <a:ext cx="128016" cy="566928"/>
+            <a:off x="7726679" y="1600200"/>
+            <a:ext cx="128016" cy="3977639"/>
           </a:xfrm>
           <a:prstGeom prst="rect">
             <a:avLst/>
@@ -4798,45 +4818,30 @@
           </a:p>
         </p:txBody>
       </p:sp>
-      <p:sp>
-        <p:nvSpPr>
-          <p:cNvPr id="10" name="TextBox 9"/>
-          <p:cNvSpPr txBox="1"/>
-          <p:nvPr/>
-        </p:nvSpPr>
-        <p:spPr>
-          <a:xfrm>
-            <a:off x="566928" y="5916168"/>
-            <a:ext cx="11064240" cy="457200"/>
-          </a:xfrm>
-          <a:prstGeom prst="rect">
-            <a:avLst/>
-          </a:prstGeom>
-          <a:noFill/>
-        </p:spPr>
-        <p:txBody>
-          <a:bodyPr wrap="square">
-            <a:spAutoFit/>
-          </a:bodyPr>
-          <a:lstStyle/>
-          <a:p>
-            <a:pPr algn="l">
-              <a:lnSpc>
-                <a:spcPct val="100000"/>
-              </a:lnSpc>
-            </a:pPr>
-            <a:r>
-              <a:rPr sz="1770" b="0" i="1">
-                <a:solidFill>
-                  <a:srgbClr val="0F2A43"/>
-                </a:solidFill>
-                <a:latin typeface="Times New Roman"/>
-              </a:rPr>
-              <a:t>The tools exist — but speed and political will decide whether they work.</a:t>
-            </a:r>
-          </a:p>
-        </p:txBody>
-      </p:sp>
+      <p:pic>
+        <p:nvPicPr>
+          <p:cNvPr id="10" name="Picture 9" descr="image.png"/>
+          <p:cNvPicPr>
+            <a:picLocks noChangeAspect="1"/>
+          </p:cNvPicPr>
+          <p:nvPr/>
+        </p:nvPicPr>
+        <p:blipFill>
+          <a:blip r:embed="rId3"/>
+          <a:stretch>
+            <a:fillRect/>
+          </a:stretch>
+        </p:blipFill>
+        <p:spPr>
+          <a:xfrm>
+            <a:off x="7987283" y="1828799"/>
+            <a:ext cx="3520440" cy="3520440"/>
+          </a:xfrm>
+          <a:prstGeom prst="rect">
+            <a:avLst/>
+          </a:prstGeom>
+        </p:spPr>
+      </p:pic>
       <p:sp>
         <p:nvSpPr>
           <p:cNvPr id="11" name="Rectangle 10"/>
@@ -4845,8 +4850,52 @@
         </p:nvSpPr>
         <p:spPr>
           <a:xfrm>
-            <a:off x="548640" y="6583680"/>
-            <a:ext cx="411480" cy="32004"/>
+            <a:off x="0" y="5779008"/>
+            <a:ext cx="12191695" cy="566928"/>
+          </a:xfrm>
+          <a:prstGeom prst="rect">
+            <a:avLst/>
+          </a:prstGeom>
+          <a:solidFill>
+            <a:srgbClr val="F2F4F7"/>
+          </a:solidFill>
+          <a:ln>
+            <a:noFill/>
+          </a:ln>
+          <a:effectLst/>
+        </p:spPr>
+        <p:style>
+          <a:lnRef idx="1">
+            <a:schemeClr val="accent1"/>
+          </a:lnRef>
+          <a:fillRef idx="3">
+            <a:schemeClr val="accent1"/>
+          </a:fillRef>
+          <a:effectRef idx="2">
+            <a:schemeClr val="accent1"/>
+          </a:effectRef>
+          <a:fontRef idx="minor">
+            <a:schemeClr val="lt1"/>
+          </a:fontRef>
+        </p:style>
+        <p:txBody>
+          <a:bodyPr rtlCol="0" anchor="ctr"/>
+          <a:lstStyle/>
+          <a:p>
+            <a:pPr algn="ctr"/>
+          </a:p>
+        </p:txBody>
+      </p:sp>
+      <p:sp>
+        <p:nvSpPr>
+          <p:cNvPr id="12" name="Rectangle 11"/>
+          <p:cNvSpPr/>
+          <p:nvPr/>
+        </p:nvSpPr>
+        <p:spPr>
+          <a:xfrm>
+            <a:off x="0" y="5779008"/>
+            <a:ext cx="128016" cy="566928"/>
           </a:xfrm>
           <a:prstGeom prst="rect">
             <a:avLst/>
@@ -4883,7 +4932,90 @@
       </p:sp>
       <p:sp>
         <p:nvSpPr>
-          <p:cNvPr id="12" name="TextBox 11"/>
+          <p:cNvPr id="13" name="TextBox 12"/>
+          <p:cNvSpPr txBox="1"/>
+          <p:nvPr/>
+        </p:nvSpPr>
+        <p:spPr>
+          <a:xfrm>
+            <a:off x="566928" y="5916168"/>
+            <a:ext cx="11064240" cy="457200"/>
+          </a:xfrm>
+          <a:prstGeom prst="rect">
+            <a:avLst/>
+          </a:prstGeom>
+          <a:noFill/>
+        </p:spPr>
+        <p:txBody>
+          <a:bodyPr wrap="square">
+            <a:spAutoFit/>
+          </a:bodyPr>
+          <a:lstStyle/>
+          <a:p>
+            <a:pPr algn="l">
+              <a:lnSpc>
+                <a:spcPct val="100000"/>
+              </a:lnSpc>
+            </a:pPr>
+            <a:r>
+              <a:rPr sz="1770" b="0" i="1">
+                <a:solidFill>
+                  <a:srgbClr val="0F2A43"/>
+                </a:solidFill>
+                <a:latin typeface="Times New Roman"/>
+              </a:rPr>
+              <a:t>The tools exist — but speed and political will decide whether they work.</a:t>
+            </a:r>
+          </a:p>
+        </p:txBody>
+      </p:sp>
+      <p:sp>
+        <p:nvSpPr>
+          <p:cNvPr id="14" name="Rectangle 13"/>
+          <p:cNvSpPr/>
+          <p:nvPr/>
+        </p:nvSpPr>
+        <p:spPr>
+          <a:xfrm>
+            <a:off x="548640" y="6583680"/>
+            <a:ext cx="411480" cy="32004"/>
+          </a:xfrm>
+          <a:prstGeom prst="rect">
+            <a:avLst/>
+          </a:prstGeom>
+          <a:solidFill>
+            <a:srgbClr val="C08A2B"/>
+          </a:solidFill>
+          <a:ln>
+            <a:noFill/>
+          </a:ln>
+          <a:effectLst/>
+        </p:spPr>
+        <p:style>
+          <a:lnRef idx="1">
+            <a:schemeClr val="accent1"/>
+          </a:lnRef>
+          <a:fillRef idx="3">
+            <a:schemeClr val="accent1"/>
+          </a:fillRef>
+          <a:effectRef idx="2">
+            <a:schemeClr val="accent1"/>
+          </a:effectRef>
+          <a:fontRef idx="minor">
+            <a:schemeClr val="lt1"/>
+          </a:fontRef>
+        </p:style>
+        <p:txBody>
+          <a:bodyPr rtlCol="0" anchor="ctr"/>
+          <a:lstStyle/>
+          <a:p>
+            <a:pPr algn="ctr"/>
+          </a:p>
+        </p:txBody>
+      </p:sp>
+      <p:sp>
+        <p:nvSpPr>
+          <p:cNvPr id="15" name="TextBox 14"/>
           <p:cNvSpPr txBox="1"/>
           <p:nvPr/>
         </p:nvSpPr>
@@ -5144,8 +5276,8 @@
         </p:nvSpPr>
         <p:spPr>
           <a:xfrm>
-            <a:off x="640080" y="1920240"/>
-            <a:ext cx="10881360" cy="4572000"/>
+            <a:off x="640080" y="1874519"/>
+            <a:ext cx="6766560" cy="4572000"/>
           </a:xfrm>
           <a:prstGeom prst="rect">
             <a:avLst/>
@@ -5163,11 +5295,11 @@
                 <a:spcPct val="105000"/>
               </a:lnSpc>
               <a:spcAft>
-                <a:spcPts val="3000"/>
+                <a:spcPts val="2000"/>
               </a:spcAft>
             </a:pPr>
             <a:r>
-              <a:rPr sz="2242" b="1">
+              <a:rPr sz="2005" b="1">
                 <a:solidFill>
                   <a:srgbClr val="0F2A43"/>
                 </a:solidFill>
@@ -5176,13 +5308,13 @@
               <a:t>•  Ghislaine Maxwell (UK): </a:t>
             </a:r>
             <a:r>
-              <a:rPr sz="2242">
+              <a:rPr sz="2005">
                 <a:solidFill>
                   <a:srgbClr val="334455"/>
                 </a:solidFill>
                 <a:latin typeface="Times New Roman"/>
               </a:rPr>
-              <a:t>convicted in 2021 of sex-trafficking conspiracy in a US court.</a:t>
+              <a:t>convicted in 2021 in a US court.</a:t>
             </a:r>
           </a:p>
           <a:p>
@@ -5191,26 +5323,26 @@
                 <a:spcPct val="105000"/>
               </a:lnSpc>
               <a:spcAft>
-                <a:spcPts val="3000"/>
+                <a:spcPts val="2000"/>
               </a:spcAft>
             </a:pPr>
             <a:r>
-              <a:rPr sz="2242" b="1">
+              <a:rPr sz="2005" b="1">
                 <a:solidFill>
                   <a:srgbClr val="0F2A43"/>
                 </a:solidFill>
                 <a:latin typeface="Times New Roman"/>
               </a:rPr>
-              <a:t>•  Prince Andrew: </a:t>
-            </a:r>
-            <a:r>
-              <a:rPr sz="2242">
+              <a:t>•  Prince Andrew (UK): </a:t>
+            </a:r>
+            <a:r>
+              <a:rPr sz="2005">
                 <a:solidFill>
                   <a:srgbClr val="334455"/>
                 </a:solidFill>
                 <a:latin typeface="Times New Roman"/>
               </a:rPr>
-              <a:t>settled a US civil claim in 2022 and later stepped back from royal titles.</a:t>
+              <a:t>settled a US civil claim in 2022; later stepped back from royal titles.</a:t>
             </a:r>
           </a:p>
           <a:p>
@@ -5219,17 +5351,17 @@
                 <a:spcPct val="105000"/>
               </a:lnSpc>
               <a:spcAft>
-                <a:spcPts val="3000"/>
+                <a:spcPts val="2000"/>
               </a:spcAft>
             </a:pPr>
             <a:r>
-              <a:rPr sz="2242">
+              <a:rPr sz="2005">
                 <a:solidFill>
                   <a:srgbClr val="334455"/>
                 </a:solidFill>
                 <a:latin typeface="Times New Roman"/>
               </a:rPr>
-              <a:t>•  High status confers no criminal immunity — but it can create practical and diplomatic hurdles.</a:t>
+              <a:t>•  High status is no immunity — but it adds practical and diplomatic hurdles.</a:t>
             </a:r>
           </a:p>
           <a:p>
@@ -5238,17 +5370,17 @@
                 <a:spcPct val="105000"/>
               </a:lnSpc>
               <a:spcAft>
-                <a:spcPts val="3000"/>
+                <a:spcPts val="2000"/>
               </a:spcAft>
             </a:pPr>
             <a:r>
-              <a:rPr sz="2242">
+              <a:rPr sz="2005">
                 <a:solidFill>
                   <a:srgbClr val="334455"/>
                 </a:solidFill>
                 <a:latin typeface="Times New Roman"/>
               </a:rPr>
-              <a:t>•  Foreign nationality complicates arrest, extradition and the gathering of evidence abroad.</a:t>
+              <a:t>•  Foreign nationality complicates arrest, extradition and gathering evidence abroad.</a:t>
             </a:r>
           </a:p>
         </p:txBody>
@@ -5261,8 +5393,8 @@
         </p:nvSpPr>
         <p:spPr>
           <a:xfrm>
-            <a:off x="0" y="5779008"/>
-            <a:ext cx="12191695" cy="566928"/>
+            <a:off x="7726679" y="1600200"/>
+            <a:ext cx="3913632" cy="3977639"/>
           </a:xfrm>
           <a:prstGeom prst="rect">
             <a:avLst/>
@@ -5305,8 +5437,8 @@
         </p:nvSpPr>
         <p:spPr>
           <a:xfrm>
-            <a:off x="0" y="5779008"/>
-            <a:ext cx="128016" cy="566928"/>
+            <a:off x="7726679" y="1600200"/>
+            <a:ext cx="128016" cy="3977639"/>
           </a:xfrm>
           <a:prstGeom prst="rect">
             <a:avLst/>
@@ -5349,8 +5481,8 @@
         </p:nvSpPr>
         <p:spPr>
           <a:xfrm>
-            <a:off x="566928" y="5916168"/>
-            <a:ext cx="11064240" cy="457200"/>
+            <a:off x="8019288" y="1792224"/>
+            <a:ext cx="3474720" cy="274320"/>
           </a:xfrm>
           <a:prstGeom prst="rect">
             <a:avLst/>
@@ -5369,27 +5501,436 @@
               </a:lnSpc>
             </a:pPr>
             <a:r>
-              <a:rPr sz="1770" b="0" i="1">
+              <a:rPr sz="1416" b="1" i="0">
+                <a:solidFill>
+                  <a:srgbClr val="C08A2B"/>
+                </a:solidFill>
+                <a:latin typeface="Times New Roman"/>
+              </a:rPr>
+              <a:t>KEY FIGURES  ·  WHAT IS ADJUDICATED</a:t>
+            </a:r>
+          </a:p>
+        </p:txBody>
+      </p:sp>
+      <p:pic>
+        <p:nvPicPr>
+          <p:cNvPr id="11" name="Picture 10" descr="image.png"/>
+          <p:cNvPicPr>
+            <a:picLocks noChangeAspect="1"/>
+          </p:cNvPicPr>
+          <p:nvPr/>
+        </p:nvPicPr>
+        <p:blipFill>
+          <a:blip r:embed="rId3"/>
+          <a:stretch>
+            <a:fillRect/>
+          </a:stretch>
+        </p:blipFill>
+        <p:spPr>
+          <a:xfrm>
+            <a:off x="8065008" y="2331720"/>
+            <a:ext cx="768096" cy="384048"/>
+          </a:xfrm>
+          <a:prstGeom prst="rect">
+            <a:avLst/>
+          </a:prstGeom>
+        </p:spPr>
+      </p:pic>
+      <p:sp>
+        <p:nvSpPr>
+          <p:cNvPr id="12" name="TextBox 11"/>
+          <p:cNvSpPr txBox="1"/>
+          <p:nvPr/>
+        </p:nvSpPr>
+        <p:spPr>
+          <a:xfrm>
+            <a:off x="8979408" y="2267712"/>
+            <a:ext cx="2560320" cy="274320"/>
+          </a:xfrm>
+          <a:prstGeom prst="rect">
+            <a:avLst/>
+          </a:prstGeom>
+          <a:noFill/>
+        </p:spPr>
+        <p:txBody>
+          <a:bodyPr wrap="square">
+            <a:spAutoFit/>
+          </a:bodyPr>
+          <a:lstStyle/>
+          <a:p>
+            <a:pPr algn="l">
+              <a:lnSpc>
+                <a:spcPct val="100000"/>
+              </a:lnSpc>
+            </a:pPr>
+            <a:r>
+              <a:rPr sz="1888" b="1" i="0">
                 <a:solidFill>
                   <a:srgbClr val="0F2A43"/>
                 </a:solidFill>
                 <a:latin typeface="Times New Roman"/>
               </a:rPr>
-              <a:t>Stick to what is adjudicated: charges, a conviction, a settled civil case — not speculation.</a:t>
-            </a:r>
-          </a:p>
-        </p:txBody>
-      </p:sp>
-      <p:sp>
-        <p:nvSpPr>
-          <p:cNvPr id="11" name="Rectangle 10"/>
+              <a:t>Ghislaine Maxwell</a:t>
+            </a:r>
+          </a:p>
+        </p:txBody>
+      </p:sp>
+      <p:sp>
+        <p:nvSpPr>
+          <p:cNvPr id="13" name="TextBox 12"/>
+          <p:cNvSpPr txBox="1"/>
+          <p:nvPr/>
+        </p:nvSpPr>
+        <p:spPr>
+          <a:xfrm>
+            <a:off x="8979408" y="2560320"/>
+            <a:ext cx="2560320" cy="228600"/>
+          </a:xfrm>
+          <a:prstGeom prst="rect">
+            <a:avLst/>
+          </a:prstGeom>
+          <a:noFill/>
+        </p:spPr>
+        <p:txBody>
+          <a:bodyPr wrap="square">
+            <a:spAutoFit/>
+          </a:bodyPr>
+          <a:lstStyle/>
+          <a:p>
+            <a:pPr algn="l">
+              <a:lnSpc>
+                <a:spcPct val="100000"/>
+              </a:lnSpc>
+            </a:pPr>
+            <a:r>
+              <a:rPr sz="1416" b="0" i="1">
+                <a:solidFill>
+                  <a:srgbClr val="6B7682"/>
+                </a:solidFill>
+                <a:latin typeface="Times New Roman"/>
+              </a:rPr>
+              <a:t>United Kingdom</a:t>
+            </a:r>
+          </a:p>
+        </p:txBody>
+      </p:sp>
+      <p:sp>
+        <p:nvSpPr>
+          <p:cNvPr id="14" name="TextBox 13"/>
+          <p:cNvSpPr txBox="1"/>
+          <p:nvPr/>
+        </p:nvSpPr>
+        <p:spPr>
+          <a:xfrm>
+            <a:off x="8065008" y="2880360"/>
+            <a:ext cx="3383280" cy="548640"/>
+          </a:xfrm>
+          <a:prstGeom prst="rect">
+            <a:avLst/>
+          </a:prstGeom>
+          <a:noFill/>
+        </p:spPr>
+        <p:txBody>
+          <a:bodyPr wrap="square">
+            <a:spAutoFit/>
+          </a:bodyPr>
+          <a:lstStyle/>
+          <a:p>
+            <a:pPr algn="l">
+              <a:lnSpc>
+                <a:spcPct val="110000"/>
+              </a:lnSpc>
+            </a:pPr>
+            <a:r>
+              <a:rPr sz="1534" b="1" i="0">
+                <a:solidFill>
+                  <a:srgbClr val="C08A2B"/>
+                </a:solidFill>
+                <a:latin typeface="Times New Roman"/>
+              </a:rPr>
+              <a:t>Convicted of sex-trafficking conspiracy · 2021</a:t>
+            </a:r>
+          </a:p>
+        </p:txBody>
+      </p:sp>
+      <p:sp>
+        <p:nvSpPr>
+          <p:cNvPr id="15" name="Rectangle 14"/>
           <p:cNvSpPr/>
           <p:nvPr/>
         </p:nvSpPr>
         <p:spPr>
           <a:xfrm>
-            <a:off x="548640" y="6583680"/>
-            <a:ext cx="411480" cy="32004"/>
+            <a:off x="8065008" y="3611880"/>
+            <a:ext cx="3291840" cy="13716"/>
+          </a:xfrm>
+          <a:prstGeom prst="rect">
+            <a:avLst/>
+          </a:prstGeom>
+          <a:solidFill>
+            <a:srgbClr val="6B7682"/>
+          </a:solidFill>
+          <a:ln>
+            <a:noFill/>
+          </a:ln>
+          <a:effectLst/>
+        </p:spPr>
+        <p:style>
+          <a:lnRef idx="1">
+            <a:schemeClr val="accent1"/>
+          </a:lnRef>
+          <a:fillRef idx="3">
+            <a:schemeClr val="accent1"/>
+          </a:fillRef>
+          <a:effectRef idx="2">
+            <a:schemeClr val="accent1"/>
+          </a:effectRef>
+          <a:fontRef idx="minor">
+            <a:schemeClr val="lt1"/>
+          </a:fontRef>
+        </p:style>
+        <p:txBody>
+          <a:bodyPr rtlCol="0" anchor="ctr"/>
+          <a:lstStyle/>
+          <a:p>
+            <a:pPr algn="ctr"/>
+          </a:p>
+        </p:txBody>
+      </p:sp>
+      <p:pic>
+        <p:nvPicPr>
+          <p:cNvPr id="16" name="Picture 15" descr="image.png"/>
+          <p:cNvPicPr>
+            <a:picLocks noChangeAspect="1"/>
+          </p:cNvPicPr>
+          <p:nvPr/>
+        </p:nvPicPr>
+        <p:blipFill>
+          <a:blip r:embed="rId3"/>
+          <a:stretch>
+            <a:fillRect/>
+          </a:stretch>
+        </p:blipFill>
+        <p:spPr>
+          <a:xfrm>
+            <a:off x="8065008" y="3794760"/>
+            <a:ext cx="768096" cy="384048"/>
+          </a:xfrm>
+          <a:prstGeom prst="rect">
+            <a:avLst/>
+          </a:prstGeom>
+        </p:spPr>
+      </p:pic>
+      <p:sp>
+        <p:nvSpPr>
+          <p:cNvPr id="17" name="TextBox 16"/>
+          <p:cNvSpPr txBox="1"/>
+          <p:nvPr/>
+        </p:nvSpPr>
+        <p:spPr>
+          <a:xfrm>
+            <a:off x="8979408" y="3730752"/>
+            <a:ext cx="2560320" cy="274320"/>
+          </a:xfrm>
+          <a:prstGeom prst="rect">
+            <a:avLst/>
+          </a:prstGeom>
+          <a:noFill/>
+        </p:spPr>
+        <p:txBody>
+          <a:bodyPr wrap="square">
+            <a:spAutoFit/>
+          </a:bodyPr>
+          <a:lstStyle/>
+          <a:p>
+            <a:pPr algn="l">
+              <a:lnSpc>
+                <a:spcPct val="100000"/>
+              </a:lnSpc>
+            </a:pPr>
+            <a:r>
+              <a:rPr sz="1888" b="1" i="0">
+                <a:solidFill>
+                  <a:srgbClr val="0F2A43"/>
+                </a:solidFill>
+                <a:latin typeface="Times New Roman"/>
+              </a:rPr>
+              <a:t>Prince Andrew</a:t>
+            </a:r>
+          </a:p>
+        </p:txBody>
+      </p:sp>
+      <p:sp>
+        <p:nvSpPr>
+          <p:cNvPr id="18" name="TextBox 17"/>
+          <p:cNvSpPr txBox="1"/>
+          <p:nvPr/>
+        </p:nvSpPr>
+        <p:spPr>
+          <a:xfrm>
+            <a:off x="8979408" y="4023360"/>
+            <a:ext cx="2560320" cy="228600"/>
+          </a:xfrm>
+          <a:prstGeom prst="rect">
+            <a:avLst/>
+          </a:prstGeom>
+          <a:noFill/>
+        </p:spPr>
+        <p:txBody>
+          <a:bodyPr wrap="square">
+            <a:spAutoFit/>
+          </a:bodyPr>
+          <a:lstStyle/>
+          <a:p>
+            <a:pPr algn="l">
+              <a:lnSpc>
+                <a:spcPct val="100000"/>
+              </a:lnSpc>
+            </a:pPr>
+            <a:r>
+              <a:rPr sz="1416" b="0" i="1">
+                <a:solidFill>
+                  <a:srgbClr val="6B7682"/>
+                </a:solidFill>
+                <a:latin typeface="Times New Roman"/>
+              </a:rPr>
+              <a:t>United Kingdom</a:t>
+            </a:r>
+          </a:p>
+        </p:txBody>
+      </p:sp>
+      <p:sp>
+        <p:nvSpPr>
+          <p:cNvPr id="19" name="TextBox 18"/>
+          <p:cNvSpPr txBox="1"/>
+          <p:nvPr/>
+        </p:nvSpPr>
+        <p:spPr>
+          <a:xfrm>
+            <a:off x="8065008" y="4343400"/>
+            <a:ext cx="3383280" cy="548640"/>
+          </a:xfrm>
+          <a:prstGeom prst="rect">
+            <a:avLst/>
+          </a:prstGeom>
+          <a:noFill/>
+        </p:spPr>
+        <p:txBody>
+          <a:bodyPr wrap="square">
+            <a:spAutoFit/>
+          </a:bodyPr>
+          <a:lstStyle/>
+          <a:p>
+            <a:pPr algn="l">
+              <a:lnSpc>
+                <a:spcPct val="110000"/>
+              </a:lnSpc>
+            </a:pPr>
+            <a:r>
+              <a:rPr sz="1534" b="1" i="0">
+                <a:solidFill>
+                  <a:srgbClr val="C08A2B"/>
+                </a:solidFill>
+                <a:latin typeface="Times New Roman"/>
+              </a:rPr>
+              <a:t>Settled a US civil claim · 2022</a:t>
+            </a:r>
+          </a:p>
+        </p:txBody>
+      </p:sp>
+      <p:sp>
+        <p:nvSpPr>
+          <p:cNvPr id="20" name="TextBox 19"/>
+          <p:cNvSpPr txBox="1"/>
+          <p:nvPr/>
+        </p:nvSpPr>
+        <p:spPr>
+          <a:xfrm>
+            <a:off x="8019288" y="5074920"/>
+            <a:ext cx="3520440" cy="457200"/>
+          </a:xfrm>
+          <a:prstGeom prst="rect">
+            <a:avLst/>
+          </a:prstGeom>
+          <a:noFill/>
+        </p:spPr>
+        <p:txBody>
+          <a:bodyPr wrap="square">
+            <a:spAutoFit/>
+          </a:bodyPr>
+          <a:lstStyle/>
+          <a:p>
+            <a:pPr algn="l">
+              <a:lnSpc>
+                <a:spcPct val="100000"/>
+              </a:lnSpc>
+            </a:pPr>
+            <a:r>
+              <a:rPr sz="1534" b="0" i="1">
+                <a:solidFill>
+                  <a:srgbClr val="0F2A43"/>
+                </a:solidFill>
+                <a:latin typeface="Times New Roman"/>
+              </a:rPr>
+              <a:t>Charges, a conviction, a settled case — not speculation.</a:t>
+            </a:r>
+          </a:p>
+        </p:txBody>
+      </p:sp>
+      <p:sp>
+        <p:nvSpPr>
+          <p:cNvPr id="21" name="Rectangle 20"/>
+          <p:cNvSpPr/>
+          <p:nvPr/>
+        </p:nvSpPr>
+        <p:spPr>
+          <a:xfrm>
+            <a:off x="0" y="5779008"/>
+            <a:ext cx="12191695" cy="566928"/>
+          </a:xfrm>
+          <a:prstGeom prst="rect">
+            <a:avLst/>
+          </a:prstGeom>
+          <a:solidFill>
+            <a:srgbClr val="F2F4F7"/>
+          </a:solidFill>
+          <a:ln>
+            <a:noFill/>
+          </a:ln>
+          <a:effectLst/>
+        </p:spPr>
+        <p:style>
+          <a:lnRef idx="1">
+            <a:schemeClr val="accent1"/>
+          </a:lnRef>
+          <a:fillRef idx="3">
+            <a:schemeClr val="accent1"/>
+          </a:fillRef>
+          <a:effectRef idx="2">
+            <a:schemeClr val="accent1"/>
+          </a:effectRef>
+          <a:fontRef idx="minor">
+            <a:schemeClr val="lt1"/>
+          </a:fontRef>
+        </p:style>
+        <p:txBody>
+          <a:bodyPr rtlCol="0" anchor="ctr"/>
+          <a:lstStyle/>
+          <a:p>
+            <a:pPr algn="ctr"/>
+          </a:p>
+        </p:txBody>
+      </p:sp>
+      <p:sp>
+        <p:nvSpPr>
+          <p:cNvPr id="22" name="Rectangle 21"/>
+          <p:cNvSpPr/>
+          <p:nvPr/>
+        </p:nvSpPr>
+        <p:spPr>
+          <a:xfrm>
+            <a:off x="0" y="5779008"/>
+            <a:ext cx="128016" cy="566928"/>
           </a:xfrm>
           <a:prstGeom prst="rect">
             <a:avLst/>
@@ -5426,7 +5967,90 @@
       </p:sp>
       <p:sp>
         <p:nvSpPr>
-          <p:cNvPr id="12" name="TextBox 11"/>
+          <p:cNvPr id="23" name="TextBox 22"/>
+          <p:cNvSpPr txBox="1"/>
+          <p:nvPr/>
+        </p:nvSpPr>
+        <p:spPr>
+          <a:xfrm>
+            <a:off x="566928" y="5916168"/>
+            <a:ext cx="11064240" cy="457200"/>
+          </a:xfrm>
+          <a:prstGeom prst="rect">
+            <a:avLst/>
+          </a:prstGeom>
+          <a:noFill/>
+        </p:spPr>
+        <p:txBody>
+          <a:bodyPr wrap="square">
+            <a:spAutoFit/>
+          </a:bodyPr>
+          <a:lstStyle/>
+          <a:p>
+            <a:pPr algn="l">
+              <a:lnSpc>
+                <a:spcPct val="100000"/>
+              </a:lnSpc>
+            </a:pPr>
+            <a:r>
+              <a:rPr sz="1770" b="0" i="1">
+                <a:solidFill>
+                  <a:srgbClr val="0F2A43"/>
+                </a:solidFill>
+                <a:latin typeface="Times New Roman"/>
+              </a:rPr>
+              <a:t>Stick to what is adjudicated: charges, a conviction, a settled civil case — not speculation.</a:t>
+            </a:r>
+          </a:p>
+        </p:txBody>
+      </p:sp>
+      <p:sp>
+        <p:nvSpPr>
+          <p:cNvPr id="24" name="Rectangle 23"/>
+          <p:cNvSpPr/>
+          <p:nvPr/>
+        </p:nvSpPr>
+        <p:spPr>
+          <a:xfrm>
+            <a:off x="548640" y="6583680"/>
+            <a:ext cx="411480" cy="32004"/>
+          </a:xfrm>
+          <a:prstGeom prst="rect">
+            <a:avLst/>
+          </a:prstGeom>
+          <a:solidFill>
+            <a:srgbClr val="C08A2B"/>
+          </a:solidFill>
+          <a:ln>
+            <a:noFill/>
+          </a:ln>
+          <a:effectLst/>
+        </p:spPr>
+        <p:style>
+          <a:lnRef idx="1">
+            <a:schemeClr val="accent1"/>
+          </a:lnRef>
+          <a:fillRef idx="3">
+            <a:schemeClr val="accent1"/>
+          </a:fillRef>
+          <a:effectRef idx="2">
+            <a:schemeClr val="accent1"/>
+          </a:effectRef>
+          <a:fontRef idx="minor">
+            <a:schemeClr val="lt1"/>
+          </a:fontRef>
+        </p:style>
+        <p:txBody>
+          <a:bodyPr rtlCol="0" anchor="ctr"/>
+          <a:lstStyle/>
+          <a:p>
+            <a:pPr algn="ctr"/>
+          </a:p>
+        </p:txBody>
+      </p:sp>
+      <p:sp>
+        <p:nvSpPr>
+          <p:cNvPr id="25" name="TextBox 24"/>
           <p:cNvSpPr txBox="1"/>
           <p:nvPr/>
         </p:nvSpPr>
@@ -6037,7 +6661,7 @@
         <p:spPr>
           <a:xfrm>
             <a:off x="640080" y="1874519"/>
-            <a:ext cx="10881360" cy="4572000"/>
+            <a:ext cx="6766560" cy="4572000"/>
           </a:xfrm>
           <a:prstGeom prst="rect">
             <a:avLst/>
@@ -6055,17 +6679,17 @@
                 <a:spcPct val="105000"/>
               </a:lnSpc>
               <a:spcAft>
-                <a:spcPts val="2800"/>
+                <a:spcPts val="2000"/>
               </a:spcAft>
             </a:pPr>
             <a:r>
-              <a:rPr sz="2242">
+              <a:rPr sz="2005">
                 <a:solidFill>
                   <a:srgbClr val="334455"/>
                 </a:solidFill>
                 <a:latin typeface="Times New Roman"/>
               </a:rPr>
-              <a:t>•  Offshore structures and trusts can obscure who really owns assets.</a:t>
+              <a:t>•  Offshore structures and trusts can hide who really owns assets.</a:t>
             </a:r>
           </a:p>
           <a:p>
@@ -6074,17 +6698,17 @@
                 <a:spcPct val="105000"/>
               </a:lnSpc>
               <a:spcAft>
-                <a:spcPts val="2800"/>
+                <a:spcPts val="2000"/>
               </a:spcAft>
             </a:pPr>
             <a:r>
-              <a:rPr sz="2242">
+              <a:rPr sz="2005">
                 <a:solidFill>
                   <a:srgbClr val="334455"/>
                 </a:solidFill>
                 <a:latin typeface="Times New Roman"/>
               </a:rPr>
-              <a:t>•  Property in several jurisdictions provides places to live, store value and move between.</a:t>
+              <a:t>•  Property in several countries: places to live, store value and move between.</a:t>
             </a:r>
           </a:p>
           <a:p>
@@ -6093,17 +6717,17 @@
                 <a:spcPct val="105000"/>
               </a:lnSpc>
               <a:spcAft>
-                <a:spcPts val="2800"/>
+                <a:spcPts val="2000"/>
               </a:spcAft>
             </a:pPr>
             <a:r>
-              <a:rPr sz="2242">
+              <a:rPr sz="2005">
                 <a:solidFill>
                   <a:srgbClr val="334455"/>
                 </a:solidFill>
                 <a:latin typeface="Times New Roman"/>
               </a:rPr>
-              <a:t>•  Private travel reduces the friction and scrutiny of ordinary border crossings.</a:t>
+              <a:t>•  Private travel reduces the scrutiny of ordinary border crossings.</a:t>
             </a:r>
           </a:p>
           <a:p>
@@ -6112,36 +6736,17 @@
                 <a:spcPct val="105000"/>
               </a:lnSpc>
               <a:spcAft>
-                <a:spcPts val="2800"/>
+                <a:spcPts val="2000"/>
               </a:spcAft>
             </a:pPr>
             <a:r>
-              <a:rPr sz="2242">
+              <a:rPr sz="2005">
                 <a:solidFill>
                   <a:srgbClr val="334455"/>
                 </a:solidFill>
                 <a:latin typeface="Times New Roman"/>
               </a:rPr>
-              <a:t>•  Multiple identity documents — including the false-name passport — illustrate evasion capacity.</a:t>
-            </a:r>
-          </a:p>
-          <a:p>
-            <a:pPr>
-              <a:lnSpc>
-                <a:spcPct val="105000"/>
-              </a:lnSpc>
-              <a:spcAft>
-                <a:spcPts val="2800"/>
-              </a:spcAft>
-            </a:pPr>
-            <a:r>
-              <a:rPr sz="2242">
-                <a:solidFill>
-                  <a:srgbClr val="334455"/>
-                </a:solidFill>
-                <a:latin typeface="Times New Roman"/>
-              </a:rPr>
-              <a:t>•  Together these convert wealth into mobility, and mobility into delay.</a:t>
+              <a:t>•  Wealth becomes mobility; mobility becomes delay.</a:t>
             </a:r>
           </a:p>
         </p:txBody>
@@ -6154,8 +6759,8 @@
         </p:nvSpPr>
         <p:spPr>
           <a:xfrm>
-            <a:off x="0" y="5779008"/>
-            <a:ext cx="12191695" cy="566928"/>
+            <a:off x="7726679" y="1600200"/>
+            <a:ext cx="3913632" cy="3977639"/>
           </a:xfrm>
           <a:prstGeom prst="rect">
             <a:avLst/>
@@ -6198,8 +6803,8 @@
         </p:nvSpPr>
         <p:spPr>
           <a:xfrm>
-            <a:off x="0" y="5779008"/>
-            <a:ext cx="128016" cy="566928"/>
+            <a:off x="7726679" y="1600200"/>
+            <a:ext cx="128016" cy="3977639"/>
           </a:xfrm>
           <a:prstGeom prst="rect">
             <a:avLst/>
@@ -6234,45 +6839,30 @@
           </a:p>
         </p:txBody>
       </p:sp>
-      <p:sp>
-        <p:nvSpPr>
-          <p:cNvPr id="10" name="TextBox 9"/>
-          <p:cNvSpPr txBox="1"/>
-          <p:nvPr/>
-        </p:nvSpPr>
-        <p:spPr>
-          <a:xfrm>
-            <a:off x="566928" y="5916168"/>
-            <a:ext cx="11064240" cy="457200"/>
-          </a:xfrm>
-          <a:prstGeom prst="rect">
-            <a:avLst/>
-          </a:prstGeom>
-          <a:noFill/>
-        </p:spPr>
-        <p:txBody>
-          <a:bodyPr wrap="square">
-            <a:spAutoFit/>
-          </a:bodyPr>
-          <a:lstStyle/>
-          <a:p>
-            <a:pPr algn="l">
-              <a:lnSpc>
-                <a:spcPct val="100000"/>
-              </a:lnSpc>
-            </a:pPr>
-            <a:r>
-              <a:rPr sz="1770" b="0" i="1">
-                <a:solidFill>
-                  <a:srgbClr val="0F2A43"/>
-                </a:solidFill>
-                <a:latin typeface="Times New Roman"/>
-              </a:rPr>
-              <a:t>None of this is unique to one man — it is how illicit elite wealth tends to behave.</a:t>
-            </a:r>
-          </a:p>
-        </p:txBody>
-      </p:sp>
+      <p:pic>
+        <p:nvPicPr>
+          <p:cNvPr id="10" name="Picture 9" descr="image.png"/>
+          <p:cNvPicPr>
+            <a:picLocks noChangeAspect="1"/>
+          </p:cNvPicPr>
+          <p:nvPr/>
+        </p:nvPicPr>
+        <p:blipFill>
+          <a:blip r:embed="rId3"/>
+          <a:stretch>
+            <a:fillRect/>
+          </a:stretch>
+        </p:blipFill>
+        <p:spPr>
+          <a:xfrm>
+            <a:off x="7987283" y="1828799"/>
+            <a:ext cx="3520440" cy="3520440"/>
+          </a:xfrm>
+          <a:prstGeom prst="rect">
+            <a:avLst/>
+          </a:prstGeom>
+        </p:spPr>
+      </p:pic>
       <p:sp>
         <p:nvSpPr>
           <p:cNvPr id="11" name="Rectangle 10"/>
@@ -6281,8 +6871,52 @@
         </p:nvSpPr>
         <p:spPr>
           <a:xfrm>
-            <a:off x="548640" y="6583680"/>
-            <a:ext cx="411480" cy="32004"/>
+            <a:off x="0" y="5779008"/>
+            <a:ext cx="12191695" cy="566928"/>
+          </a:xfrm>
+          <a:prstGeom prst="rect">
+            <a:avLst/>
+          </a:prstGeom>
+          <a:solidFill>
+            <a:srgbClr val="F2F4F7"/>
+          </a:solidFill>
+          <a:ln>
+            <a:noFill/>
+          </a:ln>
+          <a:effectLst/>
+        </p:spPr>
+        <p:style>
+          <a:lnRef idx="1">
+            <a:schemeClr val="accent1"/>
+          </a:lnRef>
+          <a:fillRef idx="3">
+            <a:schemeClr val="accent1"/>
+          </a:fillRef>
+          <a:effectRef idx="2">
+            <a:schemeClr val="accent1"/>
+          </a:effectRef>
+          <a:fontRef idx="minor">
+            <a:schemeClr val="lt1"/>
+          </a:fontRef>
+        </p:style>
+        <p:txBody>
+          <a:bodyPr rtlCol="0" anchor="ctr"/>
+          <a:lstStyle/>
+          <a:p>
+            <a:pPr algn="ctr"/>
+          </a:p>
+        </p:txBody>
+      </p:sp>
+      <p:sp>
+        <p:nvSpPr>
+          <p:cNvPr id="12" name="Rectangle 11"/>
+          <p:cNvSpPr/>
+          <p:nvPr/>
+        </p:nvSpPr>
+        <p:spPr>
+          <a:xfrm>
+            <a:off x="0" y="5779008"/>
+            <a:ext cx="128016" cy="566928"/>
           </a:xfrm>
           <a:prstGeom prst="rect">
             <a:avLst/>
@@ -6319,7 +6953,90 @@
       </p:sp>
       <p:sp>
         <p:nvSpPr>
-          <p:cNvPr id="12" name="TextBox 11"/>
+          <p:cNvPr id="13" name="TextBox 12"/>
+          <p:cNvSpPr txBox="1"/>
+          <p:nvPr/>
+        </p:nvSpPr>
+        <p:spPr>
+          <a:xfrm>
+            <a:off x="566928" y="5916168"/>
+            <a:ext cx="11064240" cy="457200"/>
+          </a:xfrm>
+          <a:prstGeom prst="rect">
+            <a:avLst/>
+          </a:prstGeom>
+          <a:noFill/>
+        </p:spPr>
+        <p:txBody>
+          <a:bodyPr wrap="square">
+            <a:spAutoFit/>
+          </a:bodyPr>
+          <a:lstStyle/>
+          <a:p>
+            <a:pPr algn="l">
+              <a:lnSpc>
+                <a:spcPct val="100000"/>
+              </a:lnSpc>
+            </a:pPr>
+            <a:r>
+              <a:rPr sz="1770" b="0" i="1">
+                <a:solidFill>
+                  <a:srgbClr val="0F2A43"/>
+                </a:solidFill>
+                <a:latin typeface="Times New Roman"/>
+              </a:rPr>
+              <a:t>None of this is unique to one man — it is how illicit elite wealth tends to behave.</a:t>
+            </a:r>
+          </a:p>
+        </p:txBody>
+      </p:sp>
+      <p:sp>
+        <p:nvSpPr>
+          <p:cNvPr id="14" name="Rectangle 13"/>
+          <p:cNvSpPr/>
+          <p:nvPr/>
+        </p:nvSpPr>
+        <p:spPr>
+          <a:xfrm>
+            <a:off x="548640" y="6583680"/>
+            <a:ext cx="411480" cy="32004"/>
+          </a:xfrm>
+          <a:prstGeom prst="rect">
+            <a:avLst/>
+          </a:prstGeom>
+          <a:solidFill>
+            <a:srgbClr val="C08A2B"/>
+          </a:solidFill>
+          <a:ln>
+            <a:noFill/>
+          </a:ln>
+          <a:effectLst/>
+        </p:spPr>
+        <p:style>
+          <a:lnRef idx="1">
+            <a:schemeClr val="accent1"/>
+          </a:lnRef>
+          <a:fillRef idx="3">
+            <a:schemeClr val="accent1"/>
+          </a:fillRef>
+          <a:effectRef idx="2">
+            <a:schemeClr val="accent1"/>
+          </a:effectRef>
+          <a:fontRef idx="minor">
+            <a:schemeClr val="lt1"/>
+          </a:fontRef>
+        </p:style>
+        <p:txBody>
+          <a:bodyPr rtlCol="0" anchor="ctr"/>
+          <a:lstStyle/>
+          <a:p>
+            <a:pPr algn="ctr"/>
+          </a:p>
+        </p:txBody>
+      </p:sp>
+      <p:sp>
+        <p:nvSpPr>
+          <p:cNvPr id="15" name="TextBox 14"/>
           <p:cNvSpPr txBox="1"/>
           <p:nvPr/>
         </p:nvSpPr>
@@ -7458,8 +8175,8 @@
         </p:nvSpPr>
         <p:spPr>
           <a:xfrm>
-            <a:off x="640080" y="1920240"/>
-            <a:ext cx="10881360" cy="4572000"/>
+            <a:off x="640080" y="1874519"/>
+            <a:ext cx="6766560" cy="4572000"/>
           </a:xfrm>
           <a:prstGeom prst="rect">
             <a:avLst/>
@@ -7477,11 +8194,11 @@
                 <a:spcPct val="105000"/>
               </a:lnSpc>
               <a:spcAft>
-                <a:spcPts val="3000"/>
+                <a:spcPts val="2000"/>
               </a:spcAft>
             </a:pPr>
             <a:r>
-              <a:rPr sz="2242" b="1">
+              <a:rPr sz="2005" b="1">
                 <a:solidFill>
                   <a:srgbClr val="0F2A43"/>
                 </a:solidFill>
@@ -7490,13 +8207,13 @@
               <a:t>•  Adversarial vs inquisitorial: </a:t>
             </a:r>
             <a:r>
-              <a:rPr sz="2242">
+              <a:rPr sz="2005">
                 <a:solidFill>
                   <a:srgbClr val="334455"/>
                 </a:solidFill>
                 <a:latin typeface="Times New Roman"/>
               </a:rPr>
-              <a:t>France's investigating magistrates can drive cases differently from US prosecutors.</a:t>
+              <a:t>France's investigating magistrates can drive cases differently.</a:t>
             </a:r>
           </a:p>
           <a:p>
@@ -7505,11 +8222,11 @@
                 <a:spcPct val="105000"/>
               </a:lnSpc>
               <a:spcAft>
-                <a:spcPts val="3000"/>
+                <a:spcPts val="2000"/>
               </a:spcAft>
             </a:pPr>
             <a:r>
-              <a:rPr sz="2242" b="1">
+              <a:rPr sz="2005" b="1">
                 <a:solidFill>
                   <a:srgbClr val="0F2A43"/>
                 </a:solidFill>
@@ -7518,13 +8235,13 @@
               <a:t>•  Victim participation: </a:t>
             </a:r>
             <a:r>
-              <a:rPr sz="2242">
+              <a:rPr sz="2005">
                 <a:solidFill>
                   <a:srgbClr val="334455"/>
                 </a:solidFill>
                 <a:latin typeface="Times New Roman"/>
               </a:rPr>
-              <a:t>some systems give victims a formal role earlier in proceedings.</a:t>
+              <a:t>some systems give victims a formal role earlier.</a:t>
             </a:r>
           </a:p>
           <a:p>
@@ -7533,11 +8250,11 @@
                 <a:spcPct val="105000"/>
               </a:lnSpc>
               <a:spcAft>
-                <a:spcPts val="3000"/>
+                <a:spcPts val="2000"/>
               </a:spcAft>
             </a:pPr>
             <a:r>
-              <a:rPr sz="2242" b="1">
+              <a:rPr sz="2005" b="1">
                 <a:solidFill>
                   <a:srgbClr val="0F2A43"/>
                 </a:solidFill>
@@ -7546,13 +8263,13 @@
               <a:t>•  Limitation periods: </a:t>
             </a:r>
             <a:r>
-              <a:rPr sz="2242">
+              <a:rPr sz="2005">
                 <a:solidFill>
                   <a:srgbClr val="334455"/>
                 </a:solidFill>
                 <a:latin typeface="Times New Roman"/>
               </a:rPr>
-              <a:t>how long after the abuse can charges still be brought?</a:t>
+              <a:t>how long after the abuse can charges be brought?</a:t>
             </a:r>
           </a:p>
           <a:p>
@@ -7561,26 +8278,17 @@
                 <a:spcPct val="105000"/>
               </a:lnSpc>
               <a:spcAft>
-                <a:spcPts val="3000"/>
+                <a:spcPts val="2000"/>
               </a:spcAft>
             </a:pPr>
             <a:r>
-              <a:rPr sz="2242" b="1">
-                <a:solidFill>
-                  <a:srgbClr val="0F2A43"/>
-                </a:solidFill>
-                <a:latin typeface="Times New Roman"/>
-              </a:rPr>
-              <a:t>•  Plea bargaining: </a:t>
-            </a:r>
-            <a:r>
-              <a:rPr sz="2242">
+              <a:rPr sz="2005">
                 <a:solidFill>
                   <a:srgbClr val="334455"/>
                 </a:solidFill>
                 <a:latin typeface="Times New Roman"/>
               </a:rPr>
-              <a:t>less central in many civil-law systems, changing the incentive to settle quietly.</a:t>
+              <a:t>•  Plea bargaining is less central in many civil-law systems.</a:t>
             </a:r>
           </a:p>
         </p:txBody>
@@ -7593,8 +8301,8 @@
         </p:nvSpPr>
         <p:spPr>
           <a:xfrm>
-            <a:off x="0" y="5779008"/>
-            <a:ext cx="12191695" cy="566928"/>
+            <a:off x="7726679" y="1600200"/>
+            <a:ext cx="3913632" cy="3977639"/>
           </a:xfrm>
           <a:prstGeom prst="rect">
             <a:avLst/>
@@ -7637,8 +8345,8 @@
         </p:nvSpPr>
         <p:spPr>
           <a:xfrm>
-            <a:off x="0" y="5779008"/>
-            <a:ext cx="128016" cy="566928"/>
+            <a:off x="7726679" y="1600200"/>
+            <a:ext cx="128016" cy="3977639"/>
           </a:xfrm>
           <a:prstGeom prst="rect">
             <a:avLst/>
@@ -7681,8 +8389,8 @@
         </p:nvSpPr>
         <p:spPr>
           <a:xfrm>
-            <a:off x="566928" y="5916168"/>
-            <a:ext cx="11064240" cy="457200"/>
+            <a:off x="8019288" y="1792224"/>
+            <a:ext cx="3474720" cy="274320"/>
           </a:xfrm>
           <a:prstGeom prst="rect">
             <a:avLst/>
@@ -7701,27 +8409,518 @@
               </a:lnSpc>
             </a:pPr>
             <a:r>
-              <a:rPr sz="1770" b="0" i="1">
+              <a:rPr sz="1534" b="1" i="0">
+                <a:solidFill>
+                  <a:srgbClr val="C08A2B"/>
+                </a:solidFill>
+                <a:latin typeface="Times New Roman"/>
+              </a:rPr>
+              <a:t>FOUR SYSTEMS COMPARED</a:t>
+            </a:r>
+          </a:p>
+        </p:txBody>
+      </p:sp>
+      <p:pic>
+        <p:nvPicPr>
+          <p:cNvPr id="11" name="Picture 10" descr="image.png"/>
+          <p:cNvPicPr>
+            <a:picLocks noChangeAspect="1"/>
+          </p:cNvPicPr>
+          <p:nvPr/>
+        </p:nvPicPr>
+        <p:blipFill>
+          <a:blip r:embed="rId3"/>
+          <a:stretch>
+            <a:fillRect/>
+          </a:stretch>
+        </p:blipFill>
+        <p:spPr>
+          <a:xfrm>
+            <a:off x="8183879" y="2331720"/>
+            <a:ext cx="1097280" cy="548640"/>
+          </a:xfrm>
+          <a:prstGeom prst="rect">
+            <a:avLst/>
+          </a:prstGeom>
+        </p:spPr>
+      </p:pic>
+      <p:sp>
+        <p:nvSpPr>
+          <p:cNvPr id="12" name="TextBox 11"/>
+          <p:cNvSpPr txBox="1"/>
+          <p:nvPr/>
+        </p:nvSpPr>
+        <p:spPr>
+          <a:xfrm>
+            <a:off x="8001000" y="2935224"/>
+            <a:ext cx="1463040" cy="237744"/>
+          </a:xfrm>
+          <a:prstGeom prst="rect">
+            <a:avLst/>
+          </a:prstGeom>
+          <a:noFill/>
+        </p:spPr>
+        <p:txBody>
+          <a:bodyPr wrap="square">
+            <a:spAutoFit/>
+          </a:bodyPr>
+          <a:lstStyle/>
+          <a:p>
+            <a:pPr algn="ctr">
+              <a:lnSpc>
+                <a:spcPct val="100000"/>
+              </a:lnSpc>
+            </a:pPr>
+            <a:r>
+              <a:rPr sz="1416" b="1" i="0">
                 <a:solidFill>
                   <a:srgbClr val="0F2A43"/>
                 </a:solidFill>
                 <a:latin typeface="Times New Roman"/>
               </a:rPr>
-              <a:t>Central question: would the UK, France or Japan have acted faster — or slower?</a:t>
-            </a:r>
-          </a:p>
-        </p:txBody>
-      </p:sp>
-      <p:sp>
-        <p:nvSpPr>
-          <p:cNvPr id="11" name="Rectangle 10"/>
+              <a:t>United States</a:t>
+            </a:r>
+          </a:p>
+        </p:txBody>
+      </p:sp>
+      <p:sp>
+        <p:nvSpPr>
+          <p:cNvPr id="13" name="TextBox 12"/>
+          <p:cNvSpPr txBox="1"/>
+          <p:nvPr/>
+        </p:nvSpPr>
+        <p:spPr>
+          <a:xfrm>
+            <a:off x="8001000" y="3154679"/>
+            <a:ext cx="1463040" cy="219456"/>
+          </a:xfrm>
+          <a:prstGeom prst="rect">
+            <a:avLst/>
+          </a:prstGeom>
+          <a:noFill/>
+        </p:spPr>
+        <p:txBody>
+          <a:bodyPr wrap="square">
+            <a:spAutoFit/>
+          </a:bodyPr>
+          <a:lstStyle/>
+          <a:p>
+            <a:pPr algn="ctr">
+              <a:lnSpc>
+                <a:spcPct val="100000"/>
+              </a:lnSpc>
+            </a:pPr>
+            <a:r>
+              <a:rPr sz="1297" b="0" i="1">
+                <a:solidFill>
+                  <a:srgbClr val="6B7682"/>
+                </a:solidFill>
+                <a:latin typeface="Times New Roman"/>
+              </a:rPr>
+              <a:t>adversarial</a:t>
+            </a:r>
+          </a:p>
+        </p:txBody>
+      </p:sp>
+      <p:pic>
+        <p:nvPicPr>
+          <p:cNvPr id="14" name="Picture 13" descr="image.png"/>
+          <p:cNvPicPr>
+            <a:picLocks noChangeAspect="1"/>
+          </p:cNvPicPr>
+          <p:nvPr/>
+        </p:nvPicPr>
+        <p:blipFill>
+          <a:blip r:embed="rId4"/>
+          <a:stretch>
+            <a:fillRect/>
+          </a:stretch>
+        </p:blipFill>
+        <p:spPr>
+          <a:xfrm>
+            <a:off x="9939528" y="2331720"/>
+            <a:ext cx="1097280" cy="548640"/>
+          </a:xfrm>
+          <a:prstGeom prst="rect">
+            <a:avLst/>
+          </a:prstGeom>
+        </p:spPr>
+      </p:pic>
+      <p:sp>
+        <p:nvSpPr>
+          <p:cNvPr id="15" name="TextBox 14"/>
+          <p:cNvSpPr txBox="1"/>
+          <p:nvPr/>
+        </p:nvSpPr>
+        <p:spPr>
+          <a:xfrm>
+            <a:off x="9756648" y="2935224"/>
+            <a:ext cx="1463040" cy="237744"/>
+          </a:xfrm>
+          <a:prstGeom prst="rect">
+            <a:avLst/>
+          </a:prstGeom>
+          <a:noFill/>
+        </p:spPr>
+        <p:txBody>
+          <a:bodyPr wrap="square">
+            <a:spAutoFit/>
+          </a:bodyPr>
+          <a:lstStyle/>
+          <a:p>
+            <a:pPr algn="ctr">
+              <a:lnSpc>
+                <a:spcPct val="100000"/>
+              </a:lnSpc>
+            </a:pPr>
+            <a:r>
+              <a:rPr sz="1416" b="1" i="0">
+                <a:solidFill>
+                  <a:srgbClr val="0F2A43"/>
+                </a:solidFill>
+                <a:latin typeface="Times New Roman"/>
+              </a:rPr>
+              <a:t>United Kingdom</a:t>
+            </a:r>
+          </a:p>
+        </p:txBody>
+      </p:sp>
+      <p:sp>
+        <p:nvSpPr>
+          <p:cNvPr id="16" name="TextBox 15"/>
+          <p:cNvSpPr txBox="1"/>
+          <p:nvPr/>
+        </p:nvSpPr>
+        <p:spPr>
+          <a:xfrm>
+            <a:off x="9756648" y="3154679"/>
+            <a:ext cx="1463040" cy="219456"/>
+          </a:xfrm>
+          <a:prstGeom prst="rect">
+            <a:avLst/>
+          </a:prstGeom>
+          <a:noFill/>
+        </p:spPr>
+        <p:txBody>
+          <a:bodyPr wrap="square">
+            <a:spAutoFit/>
+          </a:bodyPr>
+          <a:lstStyle/>
+          <a:p>
+            <a:pPr algn="ctr">
+              <a:lnSpc>
+                <a:spcPct val="100000"/>
+              </a:lnSpc>
+            </a:pPr>
+            <a:r>
+              <a:rPr sz="1297" b="0" i="1">
+                <a:solidFill>
+                  <a:srgbClr val="6B7682"/>
+                </a:solidFill>
+                <a:latin typeface="Times New Roman"/>
+              </a:rPr>
+              <a:t>adversarial</a:t>
+            </a:r>
+          </a:p>
+        </p:txBody>
+      </p:sp>
+      <p:pic>
+        <p:nvPicPr>
+          <p:cNvPr id="17" name="Picture 16" descr="image.png"/>
+          <p:cNvPicPr>
+            <a:picLocks noChangeAspect="1"/>
+          </p:cNvPicPr>
+          <p:nvPr/>
+        </p:nvPicPr>
+        <p:blipFill>
+          <a:blip r:embed="rId5"/>
+          <a:stretch>
+            <a:fillRect/>
+          </a:stretch>
+        </p:blipFill>
+        <p:spPr>
+          <a:xfrm>
+            <a:off x="8183879" y="3657600"/>
+            <a:ext cx="1097280" cy="548640"/>
+          </a:xfrm>
+          <a:prstGeom prst="rect">
+            <a:avLst/>
+          </a:prstGeom>
+        </p:spPr>
+      </p:pic>
+      <p:sp>
+        <p:nvSpPr>
+          <p:cNvPr id="18" name="TextBox 17"/>
+          <p:cNvSpPr txBox="1"/>
+          <p:nvPr/>
+        </p:nvSpPr>
+        <p:spPr>
+          <a:xfrm>
+            <a:off x="8001000" y="4261104"/>
+            <a:ext cx="1463040" cy="237744"/>
+          </a:xfrm>
+          <a:prstGeom prst="rect">
+            <a:avLst/>
+          </a:prstGeom>
+          <a:noFill/>
+        </p:spPr>
+        <p:txBody>
+          <a:bodyPr wrap="square">
+            <a:spAutoFit/>
+          </a:bodyPr>
+          <a:lstStyle/>
+          <a:p>
+            <a:pPr algn="ctr">
+              <a:lnSpc>
+                <a:spcPct val="100000"/>
+              </a:lnSpc>
+            </a:pPr>
+            <a:r>
+              <a:rPr sz="1416" b="1" i="0">
+                <a:solidFill>
+                  <a:srgbClr val="0F2A43"/>
+                </a:solidFill>
+                <a:latin typeface="Times New Roman"/>
+              </a:rPr>
+              <a:t>France</a:t>
+            </a:r>
+          </a:p>
+        </p:txBody>
+      </p:sp>
+      <p:sp>
+        <p:nvSpPr>
+          <p:cNvPr id="19" name="TextBox 18"/>
+          <p:cNvSpPr txBox="1"/>
+          <p:nvPr/>
+        </p:nvSpPr>
+        <p:spPr>
+          <a:xfrm>
+            <a:off x="8001000" y="4480560"/>
+            <a:ext cx="1463040" cy="219456"/>
+          </a:xfrm>
+          <a:prstGeom prst="rect">
+            <a:avLst/>
+          </a:prstGeom>
+          <a:noFill/>
+        </p:spPr>
+        <p:txBody>
+          <a:bodyPr wrap="square">
+            <a:spAutoFit/>
+          </a:bodyPr>
+          <a:lstStyle/>
+          <a:p>
+            <a:pPr algn="ctr">
+              <a:lnSpc>
+                <a:spcPct val="100000"/>
+              </a:lnSpc>
+            </a:pPr>
+            <a:r>
+              <a:rPr sz="1297" b="0" i="1">
+                <a:solidFill>
+                  <a:srgbClr val="6B7682"/>
+                </a:solidFill>
+                <a:latin typeface="Times New Roman"/>
+              </a:rPr>
+              <a:t>inquisitorial</a:t>
+            </a:r>
+          </a:p>
+        </p:txBody>
+      </p:sp>
+      <p:pic>
+        <p:nvPicPr>
+          <p:cNvPr id="20" name="Picture 19" descr="image.png"/>
+          <p:cNvPicPr>
+            <a:picLocks noChangeAspect="1"/>
+          </p:cNvPicPr>
+          <p:nvPr/>
+        </p:nvPicPr>
+        <p:blipFill>
+          <a:blip r:embed="rId6"/>
+          <a:stretch>
+            <a:fillRect/>
+          </a:stretch>
+        </p:blipFill>
+        <p:spPr>
+          <a:xfrm>
+            <a:off x="9939528" y="3657600"/>
+            <a:ext cx="1097280" cy="548640"/>
+          </a:xfrm>
+          <a:prstGeom prst="rect">
+            <a:avLst/>
+          </a:prstGeom>
+        </p:spPr>
+      </p:pic>
+      <p:sp>
+        <p:nvSpPr>
+          <p:cNvPr id="21" name="TextBox 20"/>
+          <p:cNvSpPr txBox="1"/>
+          <p:nvPr/>
+        </p:nvSpPr>
+        <p:spPr>
+          <a:xfrm>
+            <a:off x="9756648" y="4261104"/>
+            <a:ext cx="1463040" cy="237744"/>
+          </a:xfrm>
+          <a:prstGeom prst="rect">
+            <a:avLst/>
+          </a:prstGeom>
+          <a:noFill/>
+        </p:spPr>
+        <p:txBody>
+          <a:bodyPr wrap="square">
+            <a:spAutoFit/>
+          </a:bodyPr>
+          <a:lstStyle/>
+          <a:p>
+            <a:pPr algn="ctr">
+              <a:lnSpc>
+                <a:spcPct val="100000"/>
+              </a:lnSpc>
+            </a:pPr>
+            <a:r>
+              <a:rPr sz="1416" b="1" i="0">
+                <a:solidFill>
+                  <a:srgbClr val="0F2A43"/>
+                </a:solidFill>
+                <a:latin typeface="Times New Roman"/>
+              </a:rPr>
+              <a:t>Japan</a:t>
+            </a:r>
+          </a:p>
+        </p:txBody>
+      </p:sp>
+      <p:sp>
+        <p:nvSpPr>
+          <p:cNvPr id="22" name="TextBox 21"/>
+          <p:cNvSpPr txBox="1"/>
+          <p:nvPr/>
+        </p:nvSpPr>
+        <p:spPr>
+          <a:xfrm>
+            <a:off x="9756648" y="4480560"/>
+            <a:ext cx="1463040" cy="219456"/>
+          </a:xfrm>
+          <a:prstGeom prst="rect">
+            <a:avLst/>
+          </a:prstGeom>
+          <a:noFill/>
+        </p:spPr>
+        <p:txBody>
+          <a:bodyPr wrap="square">
+            <a:spAutoFit/>
+          </a:bodyPr>
+          <a:lstStyle/>
+          <a:p>
+            <a:pPr algn="ctr">
+              <a:lnSpc>
+                <a:spcPct val="100000"/>
+              </a:lnSpc>
+            </a:pPr>
+            <a:r>
+              <a:rPr sz="1297" b="0" i="1">
+                <a:solidFill>
+                  <a:srgbClr val="6B7682"/>
+                </a:solidFill>
+                <a:latin typeface="Times New Roman"/>
+              </a:rPr>
+              <a:t>civil-law</a:t>
+            </a:r>
+          </a:p>
+        </p:txBody>
+      </p:sp>
+      <p:sp>
+        <p:nvSpPr>
+          <p:cNvPr id="23" name="TextBox 22"/>
+          <p:cNvSpPr txBox="1"/>
+          <p:nvPr/>
+        </p:nvSpPr>
+        <p:spPr>
+          <a:xfrm>
+            <a:off x="8019288" y="5138928"/>
+            <a:ext cx="3520440" cy="274320"/>
+          </a:xfrm>
+          <a:prstGeom prst="rect">
+            <a:avLst/>
+          </a:prstGeom>
+          <a:noFill/>
+        </p:spPr>
+        <p:txBody>
+          <a:bodyPr wrap="square">
+            <a:spAutoFit/>
+          </a:bodyPr>
+          <a:lstStyle/>
+          <a:p>
+            <a:pPr algn="ctr">
+              <a:lnSpc>
+                <a:spcPct val="100000"/>
+              </a:lnSpc>
+            </a:pPr>
+            <a:r>
+              <a:rPr sz="1534" b="1" i="1">
+                <a:solidFill>
+                  <a:srgbClr val="0F2A43"/>
+                </a:solidFill>
+                <a:latin typeface="Times New Roman"/>
+              </a:rPr>
+              <a:t>Same facts — would they act faster, or slower?</a:t>
+            </a:r>
+          </a:p>
+        </p:txBody>
+      </p:sp>
+      <p:sp>
+        <p:nvSpPr>
+          <p:cNvPr id="24" name="Rectangle 23"/>
           <p:cNvSpPr/>
           <p:nvPr/>
         </p:nvSpPr>
         <p:spPr>
           <a:xfrm>
-            <a:off x="548640" y="6583680"/>
-            <a:ext cx="411480" cy="32004"/>
+            <a:off x="0" y="5779008"/>
+            <a:ext cx="12191695" cy="566928"/>
+          </a:xfrm>
+          <a:prstGeom prst="rect">
+            <a:avLst/>
+          </a:prstGeom>
+          <a:solidFill>
+            <a:srgbClr val="F2F4F7"/>
+          </a:solidFill>
+          <a:ln>
+            <a:noFill/>
+          </a:ln>
+          <a:effectLst/>
+        </p:spPr>
+        <p:style>
+          <a:lnRef idx="1">
+            <a:schemeClr val="accent1"/>
+          </a:lnRef>
+          <a:fillRef idx="3">
+            <a:schemeClr val="accent1"/>
+          </a:fillRef>
+          <a:effectRef idx="2">
+            <a:schemeClr val="accent1"/>
+          </a:effectRef>
+          <a:fontRef idx="minor">
+            <a:schemeClr val="lt1"/>
+          </a:fontRef>
+        </p:style>
+        <p:txBody>
+          <a:bodyPr rtlCol="0" anchor="ctr"/>
+          <a:lstStyle/>
+          <a:p>
+            <a:pPr algn="ctr"/>
+          </a:p>
+        </p:txBody>
+      </p:sp>
+      <p:sp>
+        <p:nvSpPr>
+          <p:cNvPr id="25" name="Rectangle 24"/>
+          <p:cNvSpPr/>
+          <p:nvPr/>
+        </p:nvSpPr>
+        <p:spPr>
+          <a:xfrm>
+            <a:off x="0" y="5779008"/>
+            <a:ext cx="128016" cy="566928"/>
           </a:xfrm>
           <a:prstGeom prst="rect">
             <a:avLst/>
@@ -7758,7 +8957,90 @@
       </p:sp>
       <p:sp>
         <p:nvSpPr>
-          <p:cNvPr id="12" name="TextBox 11"/>
+          <p:cNvPr id="26" name="TextBox 25"/>
+          <p:cNvSpPr txBox="1"/>
+          <p:nvPr/>
+        </p:nvSpPr>
+        <p:spPr>
+          <a:xfrm>
+            <a:off x="566928" y="5916168"/>
+            <a:ext cx="11064240" cy="457200"/>
+          </a:xfrm>
+          <a:prstGeom prst="rect">
+            <a:avLst/>
+          </a:prstGeom>
+          <a:noFill/>
+        </p:spPr>
+        <p:txBody>
+          <a:bodyPr wrap="square">
+            <a:spAutoFit/>
+          </a:bodyPr>
+          <a:lstStyle/>
+          <a:p>
+            <a:pPr algn="l">
+              <a:lnSpc>
+                <a:spcPct val="100000"/>
+              </a:lnSpc>
+            </a:pPr>
+            <a:r>
+              <a:rPr sz="1770" b="0" i="1">
+                <a:solidFill>
+                  <a:srgbClr val="0F2A43"/>
+                </a:solidFill>
+                <a:latin typeface="Times New Roman"/>
+              </a:rPr>
+              <a:t>Central question: would the UK, France or Japan have acted faster — or slower?</a:t>
+            </a:r>
+          </a:p>
+        </p:txBody>
+      </p:sp>
+      <p:sp>
+        <p:nvSpPr>
+          <p:cNvPr id="27" name="Rectangle 26"/>
+          <p:cNvSpPr/>
+          <p:nvPr/>
+        </p:nvSpPr>
+        <p:spPr>
+          <a:xfrm>
+            <a:off x="548640" y="6583680"/>
+            <a:ext cx="411480" cy="32004"/>
+          </a:xfrm>
+          <a:prstGeom prst="rect">
+            <a:avLst/>
+          </a:prstGeom>
+          <a:solidFill>
+            <a:srgbClr val="C08A2B"/>
+          </a:solidFill>
+          <a:ln>
+            <a:noFill/>
+          </a:ln>
+          <a:effectLst/>
+        </p:spPr>
+        <p:style>
+          <a:lnRef idx="1">
+            <a:schemeClr val="accent1"/>
+          </a:lnRef>
+          <a:fillRef idx="3">
+            <a:schemeClr val="accent1"/>
+          </a:fillRef>
+          <a:effectRef idx="2">
+            <a:schemeClr val="accent1"/>
+          </a:effectRef>
+          <a:fontRef idx="minor">
+            <a:schemeClr val="lt1"/>
+          </a:fontRef>
+        </p:style>
+        <p:txBody>
+          <a:bodyPr rtlCol="0" anchor="ctr"/>
+          <a:lstStyle/>
+          <a:p>
+            <a:pPr algn="ctr"/>
+          </a:p>
+        </p:txBody>
+      </p:sp>
+      <p:sp>
+        <p:nvSpPr>
+          <p:cNvPr id="28" name="TextBox 27"/>
           <p:cNvSpPr txBox="1"/>
           <p:nvPr/>
         </p:nvSpPr>
@@ -8368,8 +9650,8 @@
         </p:nvSpPr>
         <p:spPr>
           <a:xfrm>
-            <a:off x="640080" y="1920240"/>
-            <a:ext cx="10881360" cy="4572000"/>
+            <a:off x="640080" y="1874519"/>
+            <a:ext cx="6766560" cy="4572000"/>
           </a:xfrm>
           <a:prstGeom prst="rect">
             <a:avLst/>
@@ -8387,17 +9669,17 @@
                 <a:spcPct val="105000"/>
               </a:lnSpc>
               <a:spcAft>
-                <a:spcPts val="3000"/>
+                <a:spcPts val="2000"/>
               </a:spcAft>
             </a:pPr>
             <a:r>
-              <a:rPr sz="2242">
+              <a:rPr sz="2005">
                 <a:solidFill>
                   <a:srgbClr val="334455"/>
                 </a:solidFill>
                 <a:latin typeface="Times New Roman"/>
               </a:rPr>
-              <a:t>•  US transparency legislation drove a large release of case-related documents.</a:t>
+              <a:t>•  US transparency legislation drove a large release of case documents.</a:t>
             </a:r>
           </a:p>
           <a:p>
@@ -8406,17 +9688,17 @@
                 <a:spcPct val="105000"/>
               </a:lnSpc>
               <a:spcAft>
-                <a:spcPts val="3000"/>
+                <a:spcPts val="2000"/>
               </a:spcAft>
             </a:pPr>
             <a:r>
-              <a:rPr sz="2242">
+              <a:rPr sz="2005">
                 <a:solidFill>
                   <a:srgbClr val="334455"/>
                 </a:solidFill>
                 <a:latin typeface="Times New Roman"/>
               </a:rPr>
-              <a:t>•  Intended to answer public demand for accountability and openness.</a:t>
+              <a:t>•  Meant to answer public demand for accountability and openness.</a:t>
             </a:r>
           </a:p>
           <a:p>
@@ -8425,26 +9707,17 @@
                 <a:spcPct val="105000"/>
               </a:lnSpc>
               <a:spcAft>
-                <a:spcPts val="3000"/>
+                <a:spcPts val="2000"/>
               </a:spcAft>
             </a:pPr>
             <a:r>
-              <a:rPr sz="2242" b="1">
-                <a:solidFill>
-                  <a:srgbClr val="0F2A43"/>
-                </a:solidFill>
-                <a:latin typeface="Times New Roman"/>
-              </a:rPr>
-              <a:t>•  Survivors' concern: </a:t>
-            </a:r>
-            <a:r>
-              <a:rPr sz="2242">
+              <a:rPr sz="2005">
                 <a:solidFill>
                   <a:srgbClr val="334455"/>
                 </a:solidFill>
                 <a:latin typeface="Times New Roman"/>
               </a:rPr>
-              <a:t>the disclosures made it easy to identify those abused — but not those who may have been involved.</a:t>
+              <a:t>•  But disclosures made victims easy to identify — enablers less so.</a:t>
             </a:r>
           </a:p>
           <a:p>
@@ -8453,17 +9726,17 @@
                 <a:spcPct val="105000"/>
               </a:lnSpc>
               <a:spcAft>
-                <a:spcPts val="3000"/>
+                <a:spcPts val="2000"/>
               </a:spcAft>
             </a:pPr>
             <a:r>
-              <a:rPr sz="2242">
+              <a:rPr sz="2005">
                 <a:solidFill>
                   <a:srgbClr val="334455"/>
                 </a:solidFill>
                 <a:latin typeface="Times New Roman"/>
               </a:rPr>
-              <a:t>•  A real tension emerges between public transparency and the privacy and safety of victims.</a:t>
+              <a:t>•  A real tension: public transparency vs victim privacy and safety.</a:t>
             </a:r>
           </a:p>
         </p:txBody>
@@ -8476,8 +9749,8 @@
         </p:nvSpPr>
         <p:spPr>
           <a:xfrm>
-            <a:off x="0" y="5779008"/>
-            <a:ext cx="12191695" cy="566928"/>
+            <a:off x="7726679" y="1600200"/>
+            <a:ext cx="3913632" cy="3977639"/>
           </a:xfrm>
           <a:prstGeom prst="rect">
             <a:avLst/>
@@ -8520,8 +9793,8 @@
         </p:nvSpPr>
         <p:spPr>
           <a:xfrm>
-            <a:off x="0" y="5779008"/>
-            <a:ext cx="128016" cy="566928"/>
+            <a:off x="7726679" y="1600200"/>
+            <a:ext cx="128016" cy="3977639"/>
           </a:xfrm>
           <a:prstGeom prst="rect">
             <a:avLst/>
@@ -8556,45 +9829,30 @@
           </a:p>
         </p:txBody>
       </p:sp>
-      <p:sp>
-        <p:nvSpPr>
-          <p:cNvPr id="10" name="TextBox 9"/>
-          <p:cNvSpPr txBox="1"/>
-          <p:nvPr/>
-        </p:nvSpPr>
-        <p:spPr>
-          <a:xfrm>
-            <a:off x="566928" y="5916168"/>
-            <a:ext cx="11064240" cy="457200"/>
-          </a:xfrm>
-          <a:prstGeom prst="rect">
-            <a:avLst/>
-          </a:prstGeom>
-          <a:noFill/>
-        </p:spPr>
-        <p:txBody>
-          <a:bodyPr wrap="square">
-            <a:spAutoFit/>
-          </a:bodyPr>
-          <a:lstStyle/>
-          <a:p>
-            <a:pPr algn="l">
-              <a:lnSpc>
-                <a:spcPct val="100000"/>
-              </a:lnSpc>
-            </a:pPr>
-            <a:r>
-              <a:rPr sz="1770" b="0" i="1">
-                <a:solidFill>
-                  <a:srgbClr val="0F2A43"/>
-                </a:solidFill>
-                <a:latin typeface="Times New Roman"/>
-              </a:rPr>
-              <a:t>Transparency is not automatically just — its design determines who it protects.</a:t>
-            </a:r>
-          </a:p>
-        </p:txBody>
-      </p:sp>
+      <p:pic>
+        <p:nvPicPr>
+          <p:cNvPr id="10" name="Picture 9" descr="image.png"/>
+          <p:cNvPicPr>
+            <a:picLocks noChangeAspect="1"/>
+          </p:cNvPicPr>
+          <p:nvPr/>
+        </p:nvPicPr>
+        <p:blipFill>
+          <a:blip r:embed="rId3"/>
+          <a:stretch>
+            <a:fillRect/>
+          </a:stretch>
+        </p:blipFill>
+        <p:spPr>
+          <a:xfrm>
+            <a:off x="7987283" y="1828799"/>
+            <a:ext cx="3520440" cy="3520440"/>
+          </a:xfrm>
+          <a:prstGeom prst="rect">
+            <a:avLst/>
+          </a:prstGeom>
+        </p:spPr>
+      </p:pic>
       <p:sp>
         <p:nvSpPr>
           <p:cNvPr id="11" name="Rectangle 10"/>
@@ -8603,8 +9861,52 @@
         </p:nvSpPr>
         <p:spPr>
           <a:xfrm>
-            <a:off x="548640" y="6583680"/>
-            <a:ext cx="411480" cy="32004"/>
+            <a:off x="0" y="5779008"/>
+            <a:ext cx="12191695" cy="566928"/>
+          </a:xfrm>
+          <a:prstGeom prst="rect">
+            <a:avLst/>
+          </a:prstGeom>
+          <a:solidFill>
+            <a:srgbClr val="F2F4F7"/>
+          </a:solidFill>
+          <a:ln>
+            <a:noFill/>
+          </a:ln>
+          <a:effectLst/>
+        </p:spPr>
+        <p:style>
+          <a:lnRef idx="1">
+            <a:schemeClr val="accent1"/>
+          </a:lnRef>
+          <a:fillRef idx="3">
+            <a:schemeClr val="accent1"/>
+          </a:fillRef>
+          <a:effectRef idx="2">
+            <a:schemeClr val="accent1"/>
+          </a:effectRef>
+          <a:fontRef idx="minor">
+            <a:schemeClr val="lt1"/>
+          </a:fontRef>
+        </p:style>
+        <p:txBody>
+          <a:bodyPr rtlCol="0" anchor="ctr"/>
+          <a:lstStyle/>
+          <a:p>
+            <a:pPr algn="ctr"/>
+          </a:p>
+        </p:txBody>
+      </p:sp>
+      <p:sp>
+        <p:nvSpPr>
+          <p:cNvPr id="12" name="Rectangle 11"/>
+          <p:cNvSpPr/>
+          <p:nvPr/>
+        </p:nvSpPr>
+        <p:spPr>
+          <a:xfrm>
+            <a:off x="0" y="5779008"/>
+            <a:ext cx="128016" cy="566928"/>
           </a:xfrm>
           <a:prstGeom prst="rect">
             <a:avLst/>
@@ -8641,7 +9943,90 @@
       </p:sp>
       <p:sp>
         <p:nvSpPr>
-          <p:cNvPr id="12" name="TextBox 11"/>
+          <p:cNvPr id="13" name="TextBox 12"/>
+          <p:cNvSpPr txBox="1"/>
+          <p:nvPr/>
+        </p:nvSpPr>
+        <p:spPr>
+          <a:xfrm>
+            <a:off x="566928" y="5916168"/>
+            <a:ext cx="11064240" cy="457200"/>
+          </a:xfrm>
+          <a:prstGeom prst="rect">
+            <a:avLst/>
+          </a:prstGeom>
+          <a:noFill/>
+        </p:spPr>
+        <p:txBody>
+          <a:bodyPr wrap="square">
+            <a:spAutoFit/>
+          </a:bodyPr>
+          <a:lstStyle/>
+          <a:p>
+            <a:pPr algn="l">
+              <a:lnSpc>
+                <a:spcPct val="100000"/>
+              </a:lnSpc>
+            </a:pPr>
+            <a:r>
+              <a:rPr sz="1770" b="0" i="1">
+                <a:solidFill>
+                  <a:srgbClr val="0F2A43"/>
+                </a:solidFill>
+                <a:latin typeface="Times New Roman"/>
+              </a:rPr>
+              <a:t>Transparency is not automatically just — its design determines who it protects.</a:t>
+            </a:r>
+          </a:p>
+        </p:txBody>
+      </p:sp>
+      <p:sp>
+        <p:nvSpPr>
+          <p:cNvPr id="14" name="Rectangle 13"/>
+          <p:cNvSpPr/>
+          <p:nvPr/>
+        </p:nvSpPr>
+        <p:spPr>
+          <a:xfrm>
+            <a:off x="548640" y="6583680"/>
+            <a:ext cx="411480" cy="32004"/>
+          </a:xfrm>
+          <a:prstGeom prst="rect">
+            <a:avLst/>
+          </a:prstGeom>
+          <a:solidFill>
+            <a:srgbClr val="C08A2B"/>
+          </a:solidFill>
+          <a:ln>
+            <a:noFill/>
+          </a:ln>
+          <a:effectLst/>
+        </p:spPr>
+        <p:style>
+          <a:lnRef idx="1">
+            <a:schemeClr val="accent1"/>
+          </a:lnRef>
+          <a:fillRef idx="3">
+            <a:schemeClr val="accent1"/>
+          </a:fillRef>
+          <a:effectRef idx="2">
+            <a:schemeClr val="accent1"/>
+          </a:effectRef>
+          <a:fontRef idx="minor">
+            <a:schemeClr val="lt1"/>
+          </a:fontRef>
+        </p:style>
+        <p:txBody>
+          <a:bodyPr rtlCol="0" anchor="ctr"/>
+          <a:lstStyle/>
+          <a:p>
+            <a:pPr algn="ctr"/>
+          </a:p>
+        </p:txBody>
+      </p:sp>
+      <p:sp>
+        <p:nvSpPr>
+          <p:cNvPr id="15" name="TextBox 14"/>
           <p:cNvSpPr txBox="1"/>
           <p:nvPr/>
         </p:nvSpPr>
@@ -9120,16 +10505,40 @@
           </a:p>
         </p:txBody>
       </p:sp>
-      <p:sp>
-        <p:nvSpPr>
-          <p:cNvPr id="11" name="TextBox 10"/>
+      <p:pic>
+        <p:nvPicPr>
+          <p:cNvPr id="11" name="Picture 10" descr="image.png"/>
+          <p:cNvPicPr>
+            <a:picLocks noChangeAspect="1"/>
+          </p:cNvPicPr>
+          <p:nvPr/>
+        </p:nvPicPr>
+        <p:blipFill>
+          <a:blip r:embed="rId3"/>
+          <a:stretch>
+            <a:fillRect/>
+          </a:stretch>
+        </p:blipFill>
+        <p:spPr>
+          <a:xfrm>
+            <a:off x="8028431" y="2286000"/>
+            <a:ext cx="1188720" cy="594360"/>
+          </a:xfrm>
+          <a:prstGeom prst="rect">
+            <a:avLst/>
+          </a:prstGeom>
+        </p:spPr>
+      </p:pic>
+      <p:sp>
+        <p:nvSpPr>
+          <p:cNvPr id="12" name="TextBox 11"/>
           <p:cNvSpPr txBox="1"/>
           <p:nvPr/>
         </p:nvSpPr>
         <p:spPr>
           <a:xfrm>
-            <a:off x="8001000" y="2331720"/>
-            <a:ext cx="3474720" cy="3657600"/>
+            <a:off x="8028431" y="3108960"/>
+            <a:ext cx="3429000" cy="2468880"/>
           </a:xfrm>
           <a:prstGeom prst="rect">
             <a:avLst/>
@@ -9144,7 +10553,7 @@
           <a:p>
             <a:pPr algn="l">
               <a:lnSpc>
-                <a:spcPct val="122000"/>
+                <a:spcPct val="120000"/>
               </a:lnSpc>
             </a:pPr>
             <a:r>
@@ -9161,7 +10570,7 @@
       </p:sp>
       <p:sp>
         <p:nvSpPr>
-          <p:cNvPr id="12" name="Rectangle 11"/>
+          <p:cNvPr id="13" name="Rectangle 12"/>
           <p:cNvSpPr/>
           <p:nvPr/>
         </p:nvSpPr>
@@ -9205,7 +10614,7 @@
       </p:sp>
       <p:sp>
         <p:nvSpPr>
-          <p:cNvPr id="13" name="Rectangle 12"/>
+          <p:cNvPr id="14" name="Rectangle 13"/>
           <p:cNvSpPr/>
           <p:nvPr/>
         </p:nvSpPr>
@@ -9249,7 +10658,7 @@
       </p:sp>
       <p:sp>
         <p:nvSpPr>
-          <p:cNvPr id="14" name="TextBox 13"/>
+          <p:cNvPr id="15" name="TextBox 14"/>
           <p:cNvSpPr txBox="1"/>
           <p:nvPr/>
         </p:nvSpPr>
@@ -9288,7 +10697,7 @@
       </p:sp>
       <p:sp>
         <p:nvSpPr>
-          <p:cNvPr id="15" name="Rectangle 14"/>
+          <p:cNvPr id="16" name="Rectangle 15"/>
           <p:cNvSpPr/>
           <p:nvPr/>
         </p:nvSpPr>
@@ -9332,7 +10741,7 @@
       </p:sp>
       <p:sp>
         <p:nvSpPr>
-          <p:cNvPr id="16" name="TextBox 15"/>
+          <p:cNvPr id="17" name="TextBox 16"/>
           <p:cNvSpPr txBox="1"/>
           <p:nvPr/>
         </p:nvSpPr>
@@ -9714,113 +11123,14 @@
       </p:sp>
       <p:sp>
         <p:nvSpPr>
-          <p:cNvPr id="10" name="TextBox 9"/>
-          <p:cNvSpPr txBox="1"/>
-          <p:nvPr/>
-        </p:nvSpPr>
-        <p:spPr>
-          <a:xfrm>
-            <a:off x="731520" y="3063240"/>
-            <a:ext cx="10789920" cy="4572000"/>
-          </a:xfrm>
-          <a:prstGeom prst="rect">
-            <a:avLst/>
-          </a:prstGeom>
-          <a:noFill/>
-        </p:spPr>
-        <p:txBody>
-          <a:bodyPr wrap="square">
-            <a:spAutoFit/>
-          </a:bodyPr>
-          <a:lstStyle/>
-          <a:p>
-            <a:pPr>
-              <a:lnSpc>
-                <a:spcPct val="105000"/>
-              </a:lnSpc>
-              <a:spcAft>
-                <a:spcPts val="2000"/>
-              </a:spcAft>
-            </a:pPr>
-            <a:r>
-              <a:rPr sz="2242">
-                <a:solidFill>
-                  <a:srgbClr val="334455"/>
-                </a:solidFill>
-                <a:latin typeface="Times New Roman"/>
-              </a:rPr>
-              <a:t>•  Part 1 — Framing &amp; the international scope of the case</a:t>
-            </a:r>
-          </a:p>
-          <a:p>
-            <a:pPr>
-              <a:lnSpc>
-                <a:spcPct val="105000"/>
-              </a:lnSpc>
-              <a:spcAft>
-                <a:spcPts val="2000"/>
-              </a:spcAft>
-            </a:pPr>
-            <a:r>
-              <a:rPr sz="2242">
-                <a:solidFill>
-                  <a:srgbClr val="334455"/>
-                </a:solidFill>
-                <a:latin typeface="Times New Roman"/>
-              </a:rPr>
-              <a:t>•  Part 2 — The international legal framework (Palermo Protocol, UNTOC, jurisdiction &amp; extradition)</a:t>
-            </a:r>
-          </a:p>
-          <a:p>
-            <a:pPr>
-              <a:lnSpc>
-                <a:spcPct val="105000"/>
-              </a:lnSpc>
-              <a:spcAft>
-                <a:spcPts val="2000"/>
-              </a:spcAft>
-            </a:pPr>
-            <a:r>
-              <a:rPr sz="2242">
-                <a:solidFill>
-                  <a:srgbClr val="334455"/>
-                </a:solidFill>
-                <a:latin typeface="Times New Roman"/>
-              </a:rPr>
-              <a:t>•  Part 3 — Wealth, mobility, and the problem of "elite impunity"</a:t>
-            </a:r>
-          </a:p>
-          <a:p>
-            <a:pPr>
-              <a:lnSpc>
-                <a:spcPct val="105000"/>
-              </a:lnSpc>
-              <a:spcAft>
-                <a:spcPts val="2000"/>
-              </a:spcAft>
-            </a:pPr>
-            <a:r>
-              <a:rPr sz="2242">
-                <a:solidFill>
-                  <a:srgbClr val="334455"/>
-                </a:solidFill>
-                <a:latin typeface="Times New Roman"/>
-              </a:rPr>
-              <a:t>•  Part 4 — Accountability, transparency &amp; lessons (incl. a Japan comparison)</a:t>
-            </a:r>
-          </a:p>
-        </p:txBody>
-      </p:sp>
-      <p:sp>
-        <p:nvSpPr>
-          <p:cNvPr id="11" name="Rectangle 10"/>
+          <p:cNvPr id="10" name="Rectangle 9"/>
           <p:cNvSpPr/>
           <p:nvPr/>
         </p:nvSpPr>
         <p:spPr>
           <a:xfrm>
-            <a:off x="0" y="5779008"/>
-            <a:ext cx="12191695" cy="566928"/>
+            <a:off x="548640" y="2889504"/>
+            <a:ext cx="11091672" cy="585216"/>
           </a:xfrm>
           <a:prstGeom prst="rect">
             <a:avLst/>
@@ -9857,14 +11167,14 @@
       </p:sp>
       <p:sp>
         <p:nvSpPr>
-          <p:cNvPr id="12" name="Rectangle 11"/>
+          <p:cNvPr id="11" name="Rectangle 10"/>
           <p:cNvSpPr/>
           <p:nvPr/>
         </p:nvSpPr>
         <p:spPr>
           <a:xfrm>
-            <a:off x="0" y="5779008"/>
-            <a:ext cx="128016" cy="566928"/>
+            <a:off x="548640" y="2889504"/>
+            <a:ext cx="109728" cy="585216"/>
           </a:xfrm>
           <a:prstGeom prst="rect">
             <a:avLst/>
@@ -9899,6 +11209,30 @@
           </a:p>
         </p:txBody>
       </p:sp>
+      <p:pic>
+        <p:nvPicPr>
+          <p:cNvPr id="12" name="Picture 11" descr="image.png"/>
+          <p:cNvPicPr>
+            <a:picLocks noChangeAspect="1"/>
+          </p:cNvPicPr>
+          <p:nvPr/>
+        </p:nvPicPr>
+        <p:blipFill>
+          <a:blip r:embed="rId2"/>
+          <a:stretch>
+            <a:fillRect/>
+          </a:stretch>
+        </p:blipFill>
+        <p:spPr>
+          <a:xfrm>
+            <a:off x="777240" y="2971800"/>
+            <a:ext cx="420624" cy="420624"/>
+          </a:xfrm>
+          <a:prstGeom prst="rect">
+            <a:avLst/>
+          </a:prstGeom>
+        </p:spPr>
+      </p:pic>
       <p:sp>
         <p:nvSpPr>
           <p:cNvPr id="13" name="TextBox 12"/>
@@ -9907,8 +11241,8 @@
         </p:nvSpPr>
         <p:spPr>
           <a:xfrm>
-            <a:off x="566928" y="5916168"/>
-            <a:ext cx="11064240" cy="457200"/>
+            <a:off x="1389888" y="3054096"/>
+            <a:ext cx="960120" cy="274320"/>
           </a:xfrm>
           <a:prstGeom prst="rect">
             <a:avLst/>
@@ -9927,27 +11261,110 @@
               </a:lnSpc>
             </a:pPr>
             <a:r>
-              <a:rPr sz="1770" b="0" i="1">
+              <a:rPr sz="1652" b="1" i="0">
+                <a:solidFill>
+                  <a:srgbClr val="C08A2B"/>
+                </a:solidFill>
+                <a:latin typeface="Times New Roman"/>
+              </a:rPr>
+              <a:t>PART 1</a:t>
+            </a:r>
+          </a:p>
+        </p:txBody>
+      </p:sp>
+      <p:sp>
+        <p:nvSpPr>
+          <p:cNvPr id="14" name="TextBox 13"/>
+          <p:cNvSpPr txBox="1"/>
+          <p:nvPr/>
+        </p:nvSpPr>
+        <p:spPr>
+          <a:xfrm>
+            <a:off x="2395728" y="3044952"/>
+            <a:ext cx="9052560" cy="292608"/>
+          </a:xfrm>
+          <a:prstGeom prst="rect">
+            <a:avLst/>
+          </a:prstGeom>
+          <a:noFill/>
+        </p:spPr>
+        <p:txBody>
+          <a:bodyPr wrap="square">
+            <a:spAutoFit/>
+          </a:bodyPr>
+          <a:lstStyle/>
+          <a:p>
+            <a:pPr algn="l">
+              <a:lnSpc>
+                <a:spcPct val="100000"/>
+              </a:lnSpc>
+            </a:pPr>
+            <a:r>
+              <a:rPr sz="1770" b="1" i="0">
                 <a:solidFill>
                   <a:srgbClr val="0F2A43"/>
                 </a:solidFill>
                 <a:latin typeface="Times New Roman"/>
               </a:rPr>
-              <a:t>This presentation centres victims and legal systems — not sensational detail.</a:t>
-            </a:r>
-          </a:p>
-        </p:txBody>
-      </p:sp>
-      <p:sp>
-        <p:nvSpPr>
-          <p:cNvPr id="14" name="Rectangle 13"/>
+              <a:t>Framing &amp; the international scope of the case</a:t>
+            </a:r>
+          </a:p>
+        </p:txBody>
+      </p:sp>
+      <p:sp>
+        <p:nvSpPr>
+          <p:cNvPr id="15" name="Rectangle 14"/>
           <p:cNvSpPr/>
           <p:nvPr/>
         </p:nvSpPr>
         <p:spPr>
           <a:xfrm>
-            <a:off x="548640" y="6583680"/>
-            <a:ext cx="411480" cy="32004"/>
+            <a:off x="548640" y="3579876"/>
+            <a:ext cx="11091672" cy="585216"/>
+          </a:xfrm>
+          <a:prstGeom prst="rect">
+            <a:avLst/>
+          </a:prstGeom>
+          <a:solidFill>
+            <a:srgbClr val="F2F4F7"/>
+          </a:solidFill>
+          <a:ln>
+            <a:noFill/>
+          </a:ln>
+          <a:effectLst/>
+        </p:spPr>
+        <p:style>
+          <a:lnRef idx="1">
+            <a:schemeClr val="accent1"/>
+          </a:lnRef>
+          <a:fillRef idx="3">
+            <a:schemeClr val="accent1"/>
+          </a:fillRef>
+          <a:effectRef idx="2">
+            <a:schemeClr val="accent1"/>
+          </a:effectRef>
+          <a:fontRef idx="minor">
+            <a:schemeClr val="lt1"/>
+          </a:fontRef>
+        </p:style>
+        <p:txBody>
+          <a:bodyPr rtlCol="0" anchor="ctr"/>
+          <a:lstStyle/>
+          <a:p>
+            <a:pPr algn="ctr"/>
+          </a:p>
+        </p:txBody>
+      </p:sp>
+      <p:sp>
+        <p:nvSpPr>
+          <p:cNvPr id="16" name="Rectangle 15"/>
+          <p:cNvSpPr/>
+          <p:nvPr/>
+        </p:nvSpPr>
+        <p:spPr>
+          <a:xfrm>
+            <a:off x="548640" y="3579876"/>
+            <a:ext cx="109728" cy="585216"/>
           </a:xfrm>
           <a:prstGeom prst="rect">
             <a:avLst/>
@@ -9982,9 +11399,662 @@
           </a:p>
         </p:txBody>
       </p:sp>
-      <p:sp>
-        <p:nvSpPr>
-          <p:cNvPr id="15" name="TextBox 14"/>
+      <p:pic>
+        <p:nvPicPr>
+          <p:cNvPr id="17" name="Picture 16" descr="image.png"/>
+          <p:cNvPicPr>
+            <a:picLocks noChangeAspect="1"/>
+          </p:cNvPicPr>
+          <p:nvPr/>
+        </p:nvPicPr>
+        <p:blipFill>
+          <a:blip r:embed="rId3"/>
+          <a:stretch>
+            <a:fillRect/>
+          </a:stretch>
+        </p:blipFill>
+        <p:spPr>
+          <a:xfrm>
+            <a:off x="777240" y="3662172"/>
+            <a:ext cx="420624" cy="420624"/>
+          </a:xfrm>
+          <a:prstGeom prst="rect">
+            <a:avLst/>
+          </a:prstGeom>
+        </p:spPr>
+      </p:pic>
+      <p:sp>
+        <p:nvSpPr>
+          <p:cNvPr id="18" name="TextBox 17"/>
+          <p:cNvSpPr txBox="1"/>
+          <p:nvPr/>
+        </p:nvSpPr>
+        <p:spPr>
+          <a:xfrm>
+            <a:off x="1389888" y="3744468"/>
+            <a:ext cx="960120" cy="274320"/>
+          </a:xfrm>
+          <a:prstGeom prst="rect">
+            <a:avLst/>
+          </a:prstGeom>
+          <a:noFill/>
+        </p:spPr>
+        <p:txBody>
+          <a:bodyPr wrap="square">
+            <a:spAutoFit/>
+          </a:bodyPr>
+          <a:lstStyle/>
+          <a:p>
+            <a:pPr algn="l">
+              <a:lnSpc>
+                <a:spcPct val="100000"/>
+              </a:lnSpc>
+            </a:pPr>
+            <a:r>
+              <a:rPr sz="1652" b="1" i="0">
+                <a:solidFill>
+                  <a:srgbClr val="C08A2B"/>
+                </a:solidFill>
+                <a:latin typeface="Times New Roman"/>
+              </a:rPr>
+              <a:t>PART 2</a:t>
+            </a:r>
+          </a:p>
+        </p:txBody>
+      </p:sp>
+      <p:sp>
+        <p:nvSpPr>
+          <p:cNvPr id="19" name="TextBox 18"/>
+          <p:cNvSpPr txBox="1"/>
+          <p:nvPr/>
+        </p:nvSpPr>
+        <p:spPr>
+          <a:xfrm>
+            <a:off x="2395728" y="3735324"/>
+            <a:ext cx="9052560" cy="292608"/>
+          </a:xfrm>
+          <a:prstGeom prst="rect">
+            <a:avLst/>
+          </a:prstGeom>
+          <a:noFill/>
+        </p:spPr>
+        <p:txBody>
+          <a:bodyPr wrap="square">
+            <a:spAutoFit/>
+          </a:bodyPr>
+          <a:lstStyle/>
+          <a:p>
+            <a:pPr algn="l">
+              <a:lnSpc>
+                <a:spcPct val="100000"/>
+              </a:lnSpc>
+            </a:pPr>
+            <a:r>
+              <a:rPr sz="1770" b="1" i="0">
+                <a:solidFill>
+                  <a:srgbClr val="0F2A43"/>
+                </a:solidFill>
+                <a:latin typeface="Times New Roman"/>
+              </a:rPr>
+              <a:t>The legal framework — Palermo Protocol, UNTOC, jurisdiction &amp; extradition</a:t>
+            </a:r>
+          </a:p>
+        </p:txBody>
+      </p:sp>
+      <p:sp>
+        <p:nvSpPr>
+          <p:cNvPr id="20" name="Rectangle 19"/>
+          <p:cNvSpPr/>
+          <p:nvPr/>
+        </p:nvSpPr>
+        <p:spPr>
+          <a:xfrm>
+            <a:off x="548640" y="4270248"/>
+            <a:ext cx="11091672" cy="585216"/>
+          </a:xfrm>
+          <a:prstGeom prst="rect">
+            <a:avLst/>
+          </a:prstGeom>
+          <a:solidFill>
+            <a:srgbClr val="F2F4F7"/>
+          </a:solidFill>
+          <a:ln>
+            <a:noFill/>
+          </a:ln>
+          <a:effectLst/>
+        </p:spPr>
+        <p:style>
+          <a:lnRef idx="1">
+            <a:schemeClr val="accent1"/>
+          </a:lnRef>
+          <a:fillRef idx="3">
+            <a:schemeClr val="accent1"/>
+          </a:fillRef>
+          <a:effectRef idx="2">
+            <a:schemeClr val="accent1"/>
+          </a:effectRef>
+          <a:fontRef idx="minor">
+            <a:schemeClr val="lt1"/>
+          </a:fontRef>
+        </p:style>
+        <p:txBody>
+          <a:bodyPr rtlCol="0" anchor="ctr"/>
+          <a:lstStyle/>
+          <a:p>
+            <a:pPr algn="ctr"/>
+          </a:p>
+        </p:txBody>
+      </p:sp>
+      <p:sp>
+        <p:nvSpPr>
+          <p:cNvPr id="21" name="Rectangle 20"/>
+          <p:cNvSpPr/>
+          <p:nvPr/>
+        </p:nvSpPr>
+        <p:spPr>
+          <a:xfrm>
+            <a:off x="548640" y="4270248"/>
+            <a:ext cx="109728" cy="585216"/>
+          </a:xfrm>
+          <a:prstGeom prst="rect">
+            <a:avLst/>
+          </a:prstGeom>
+          <a:solidFill>
+            <a:srgbClr val="C08A2B"/>
+          </a:solidFill>
+          <a:ln>
+            <a:noFill/>
+          </a:ln>
+          <a:effectLst/>
+        </p:spPr>
+        <p:style>
+          <a:lnRef idx="1">
+            <a:schemeClr val="accent1"/>
+          </a:lnRef>
+          <a:fillRef idx="3">
+            <a:schemeClr val="accent1"/>
+          </a:fillRef>
+          <a:effectRef idx="2">
+            <a:schemeClr val="accent1"/>
+          </a:effectRef>
+          <a:fontRef idx="minor">
+            <a:schemeClr val="lt1"/>
+          </a:fontRef>
+        </p:style>
+        <p:txBody>
+          <a:bodyPr rtlCol="0" anchor="ctr"/>
+          <a:lstStyle/>
+          <a:p>
+            <a:pPr algn="ctr"/>
+          </a:p>
+        </p:txBody>
+      </p:sp>
+      <p:pic>
+        <p:nvPicPr>
+          <p:cNvPr id="22" name="Picture 21" descr="image.png"/>
+          <p:cNvPicPr>
+            <a:picLocks noChangeAspect="1"/>
+          </p:cNvPicPr>
+          <p:nvPr/>
+        </p:nvPicPr>
+        <p:blipFill>
+          <a:blip r:embed="rId4"/>
+          <a:stretch>
+            <a:fillRect/>
+          </a:stretch>
+        </p:blipFill>
+        <p:spPr>
+          <a:xfrm>
+            <a:off x="777240" y="4352544"/>
+            <a:ext cx="420624" cy="420624"/>
+          </a:xfrm>
+          <a:prstGeom prst="rect">
+            <a:avLst/>
+          </a:prstGeom>
+        </p:spPr>
+      </p:pic>
+      <p:sp>
+        <p:nvSpPr>
+          <p:cNvPr id="23" name="TextBox 22"/>
+          <p:cNvSpPr txBox="1"/>
+          <p:nvPr/>
+        </p:nvSpPr>
+        <p:spPr>
+          <a:xfrm>
+            <a:off x="1389888" y="4434840"/>
+            <a:ext cx="960120" cy="274320"/>
+          </a:xfrm>
+          <a:prstGeom prst="rect">
+            <a:avLst/>
+          </a:prstGeom>
+          <a:noFill/>
+        </p:spPr>
+        <p:txBody>
+          <a:bodyPr wrap="square">
+            <a:spAutoFit/>
+          </a:bodyPr>
+          <a:lstStyle/>
+          <a:p>
+            <a:pPr algn="l">
+              <a:lnSpc>
+                <a:spcPct val="100000"/>
+              </a:lnSpc>
+            </a:pPr>
+            <a:r>
+              <a:rPr sz="1652" b="1" i="0">
+                <a:solidFill>
+                  <a:srgbClr val="C08A2B"/>
+                </a:solidFill>
+                <a:latin typeface="Times New Roman"/>
+              </a:rPr>
+              <a:t>PART 3</a:t>
+            </a:r>
+          </a:p>
+        </p:txBody>
+      </p:sp>
+      <p:sp>
+        <p:nvSpPr>
+          <p:cNvPr id="24" name="TextBox 23"/>
+          <p:cNvSpPr txBox="1"/>
+          <p:nvPr/>
+        </p:nvSpPr>
+        <p:spPr>
+          <a:xfrm>
+            <a:off x="2395728" y="4425696"/>
+            <a:ext cx="9052560" cy="292608"/>
+          </a:xfrm>
+          <a:prstGeom prst="rect">
+            <a:avLst/>
+          </a:prstGeom>
+          <a:noFill/>
+        </p:spPr>
+        <p:txBody>
+          <a:bodyPr wrap="square">
+            <a:spAutoFit/>
+          </a:bodyPr>
+          <a:lstStyle/>
+          <a:p>
+            <a:pPr algn="l">
+              <a:lnSpc>
+                <a:spcPct val="100000"/>
+              </a:lnSpc>
+            </a:pPr>
+            <a:r>
+              <a:rPr sz="1770" b="1" i="0">
+                <a:solidFill>
+                  <a:srgbClr val="0F2A43"/>
+                </a:solidFill>
+                <a:latin typeface="Times New Roman"/>
+              </a:rPr>
+              <a:t>Wealth, mobility, and the problem of "elite impunity"</a:t>
+            </a:r>
+          </a:p>
+        </p:txBody>
+      </p:sp>
+      <p:sp>
+        <p:nvSpPr>
+          <p:cNvPr id="25" name="Rectangle 24"/>
+          <p:cNvSpPr/>
+          <p:nvPr/>
+        </p:nvSpPr>
+        <p:spPr>
+          <a:xfrm>
+            <a:off x="548640" y="4960620"/>
+            <a:ext cx="11091672" cy="585216"/>
+          </a:xfrm>
+          <a:prstGeom prst="rect">
+            <a:avLst/>
+          </a:prstGeom>
+          <a:solidFill>
+            <a:srgbClr val="F2F4F7"/>
+          </a:solidFill>
+          <a:ln>
+            <a:noFill/>
+          </a:ln>
+          <a:effectLst/>
+        </p:spPr>
+        <p:style>
+          <a:lnRef idx="1">
+            <a:schemeClr val="accent1"/>
+          </a:lnRef>
+          <a:fillRef idx="3">
+            <a:schemeClr val="accent1"/>
+          </a:fillRef>
+          <a:effectRef idx="2">
+            <a:schemeClr val="accent1"/>
+          </a:effectRef>
+          <a:fontRef idx="minor">
+            <a:schemeClr val="lt1"/>
+          </a:fontRef>
+        </p:style>
+        <p:txBody>
+          <a:bodyPr rtlCol="0" anchor="ctr"/>
+          <a:lstStyle/>
+          <a:p>
+            <a:pPr algn="ctr"/>
+          </a:p>
+        </p:txBody>
+      </p:sp>
+      <p:sp>
+        <p:nvSpPr>
+          <p:cNvPr id="26" name="Rectangle 25"/>
+          <p:cNvSpPr/>
+          <p:nvPr/>
+        </p:nvSpPr>
+        <p:spPr>
+          <a:xfrm>
+            <a:off x="548640" y="4960620"/>
+            <a:ext cx="109728" cy="585216"/>
+          </a:xfrm>
+          <a:prstGeom prst="rect">
+            <a:avLst/>
+          </a:prstGeom>
+          <a:solidFill>
+            <a:srgbClr val="C08A2B"/>
+          </a:solidFill>
+          <a:ln>
+            <a:noFill/>
+          </a:ln>
+          <a:effectLst/>
+        </p:spPr>
+        <p:style>
+          <a:lnRef idx="1">
+            <a:schemeClr val="accent1"/>
+          </a:lnRef>
+          <a:fillRef idx="3">
+            <a:schemeClr val="accent1"/>
+          </a:fillRef>
+          <a:effectRef idx="2">
+            <a:schemeClr val="accent1"/>
+          </a:effectRef>
+          <a:fontRef idx="minor">
+            <a:schemeClr val="lt1"/>
+          </a:fontRef>
+        </p:style>
+        <p:txBody>
+          <a:bodyPr rtlCol="0" anchor="ctr"/>
+          <a:lstStyle/>
+          <a:p>
+            <a:pPr algn="ctr"/>
+          </a:p>
+        </p:txBody>
+      </p:sp>
+      <p:pic>
+        <p:nvPicPr>
+          <p:cNvPr id="27" name="Picture 26" descr="image.png"/>
+          <p:cNvPicPr>
+            <a:picLocks noChangeAspect="1"/>
+          </p:cNvPicPr>
+          <p:nvPr/>
+        </p:nvPicPr>
+        <p:blipFill>
+          <a:blip r:embed="rId5"/>
+          <a:stretch>
+            <a:fillRect/>
+          </a:stretch>
+        </p:blipFill>
+        <p:spPr>
+          <a:xfrm>
+            <a:off x="777240" y="5042916"/>
+            <a:ext cx="420624" cy="420624"/>
+          </a:xfrm>
+          <a:prstGeom prst="rect">
+            <a:avLst/>
+          </a:prstGeom>
+        </p:spPr>
+      </p:pic>
+      <p:sp>
+        <p:nvSpPr>
+          <p:cNvPr id="28" name="TextBox 27"/>
+          <p:cNvSpPr txBox="1"/>
+          <p:nvPr/>
+        </p:nvSpPr>
+        <p:spPr>
+          <a:xfrm>
+            <a:off x="1389888" y="5125212"/>
+            <a:ext cx="960120" cy="274320"/>
+          </a:xfrm>
+          <a:prstGeom prst="rect">
+            <a:avLst/>
+          </a:prstGeom>
+          <a:noFill/>
+        </p:spPr>
+        <p:txBody>
+          <a:bodyPr wrap="square">
+            <a:spAutoFit/>
+          </a:bodyPr>
+          <a:lstStyle/>
+          <a:p>
+            <a:pPr algn="l">
+              <a:lnSpc>
+                <a:spcPct val="100000"/>
+              </a:lnSpc>
+            </a:pPr>
+            <a:r>
+              <a:rPr sz="1652" b="1" i="0">
+                <a:solidFill>
+                  <a:srgbClr val="C08A2B"/>
+                </a:solidFill>
+                <a:latin typeface="Times New Roman"/>
+              </a:rPr>
+              <a:t>PART 4</a:t>
+            </a:r>
+          </a:p>
+        </p:txBody>
+      </p:sp>
+      <p:sp>
+        <p:nvSpPr>
+          <p:cNvPr id="29" name="TextBox 28"/>
+          <p:cNvSpPr txBox="1"/>
+          <p:nvPr/>
+        </p:nvSpPr>
+        <p:spPr>
+          <a:xfrm>
+            <a:off x="2395728" y="5116068"/>
+            <a:ext cx="9052560" cy="292608"/>
+          </a:xfrm>
+          <a:prstGeom prst="rect">
+            <a:avLst/>
+          </a:prstGeom>
+          <a:noFill/>
+        </p:spPr>
+        <p:txBody>
+          <a:bodyPr wrap="square">
+            <a:spAutoFit/>
+          </a:bodyPr>
+          <a:lstStyle/>
+          <a:p>
+            <a:pPr algn="l">
+              <a:lnSpc>
+                <a:spcPct val="100000"/>
+              </a:lnSpc>
+            </a:pPr>
+            <a:r>
+              <a:rPr sz="1770" b="1" i="0">
+                <a:solidFill>
+                  <a:srgbClr val="0F2A43"/>
+                </a:solidFill>
+                <a:latin typeface="Times New Roman"/>
+              </a:rPr>
+              <a:t>Accountability, transparency &amp; lessons (incl. a Japan comparison)</a:t>
+            </a:r>
+          </a:p>
+        </p:txBody>
+      </p:sp>
+      <p:sp>
+        <p:nvSpPr>
+          <p:cNvPr id="30" name="Rectangle 29"/>
+          <p:cNvSpPr/>
+          <p:nvPr/>
+        </p:nvSpPr>
+        <p:spPr>
+          <a:xfrm>
+            <a:off x="0" y="5779008"/>
+            <a:ext cx="12191695" cy="566928"/>
+          </a:xfrm>
+          <a:prstGeom prst="rect">
+            <a:avLst/>
+          </a:prstGeom>
+          <a:solidFill>
+            <a:srgbClr val="F2F4F7"/>
+          </a:solidFill>
+          <a:ln>
+            <a:noFill/>
+          </a:ln>
+          <a:effectLst/>
+        </p:spPr>
+        <p:style>
+          <a:lnRef idx="1">
+            <a:schemeClr val="accent1"/>
+          </a:lnRef>
+          <a:fillRef idx="3">
+            <a:schemeClr val="accent1"/>
+          </a:fillRef>
+          <a:effectRef idx="2">
+            <a:schemeClr val="accent1"/>
+          </a:effectRef>
+          <a:fontRef idx="minor">
+            <a:schemeClr val="lt1"/>
+          </a:fontRef>
+        </p:style>
+        <p:txBody>
+          <a:bodyPr rtlCol="0" anchor="ctr"/>
+          <a:lstStyle/>
+          <a:p>
+            <a:pPr algn="ctr"/>
+          </a:p>
+        </p:txBody>
+      </p:sp>
+      <p:sp>
+        <p:nvSpPr>
+          <p:cNvPr id="31" name="Rectangle 30"/>
+          <p:cNvSpPr/>
+          <p:nvPr/>
+        </p:nvSpPr>
+        <p:spPr>
+          <a:xfrm>
+            <a:off x="0" y="5779008"/>
+            <a:ext cx="128016" cy="566928"/>
+          </a:xfrm>
+          <a:prstGeom prst="rect">
+            <a:avLst/>
+          </a:prstGeom>
+          <a:solidFill>
+            <a:srgbClr val="C08A2B"/>
+          </a:solidFill>
+          <a:ln>
+            <a:noFill/>
+          </a:ln>
+          <a:effectLst/>
+        </p:spPr>
+        <p:style>
+          <a:lnRef idx="1">
+            <a:schemeClr val="accent1"/>
+          </a:lnRef>
+          <a:fillRef idx="3">
+            <a:schemeClr val="accent1"/>
+          </a:fillRef>
+          <a:effectRef idx="2">
+            <a:schemeClr val="accent1"/>
+          </a:effectRef>
+          <a:fontRef idx="minor">
+            <a:schemeClr val="lt1"/>
+          </a:fontRef>
+        </p:style>
+        <p:txBody>
+          <a:bodyPr rtlCol="0" anchor="ctr"/>
+          <a:lstStyle/>
+          <a:p>
+            <a:pPr algn="ctr"/>
+          </a:p>
+        </p:txBody>
+      </p:sp>
+      <p:sp>
+        <p:nvSpPr>
+          <p:cNvPr id="32" name="TextBox 31"/>
+          <p:cNvSpPr txBox="1"/>
+          <p:nvPr/>
+        </p:nvSpPr>
+        <p:spPr>
+          <a:xfrm>
+            <a:off x="566928" y="5916168"/>
+            <a:ext cx="11064240" cy="457200"/>
+          </a:xfrm>
+          <a:prstGeom prst="rect">
+            <a:avLst/>
+          </a:prstGeom>
+          <a:noFill/>
+        </p:spPr>
+        <p:txBody>
+          <a:bodyPr wrap="square">
+            <a:spAutoFit/>
+          </a:bodyPr>
+          <a:lstStyle/>
+          <a:p>
+            <a:pPr algn="l">
+              <a:lnSpc>
+                <a:spcPct val="100000"/>
+              </a:lnSpc>
+            </a:pPr>
+            <a:r>
+              <a:rPr sz="1770" b="0" i="1">
+                <a:solidFill>
+                  <a:srgbClr val="0F2A43"/>
+                </a:solidFill>
+                <a:latin typeface="Times New Roman"/>
+              </a:rPr>
+              <a:t>This presentation centres victims and legal systems — not sensational detail.</a:t>
+            </a:r>
+          </a:p>
+        </p:txBody>
+      </p:sp>
+      <p:sp>
+        <p:nvSpPr>
+          <p:cNvPr id="33" name="Rectangle 32"/>
+          <p:cNvSpPr/>
+          <p:nvPr/>
+        </p:nvSpPr>
+        <p:spPr>
+          <a:xfrm>
+            <a:off x="548640" y="6583680"/>
+            <a:ext cx="411480" cy="32004"/>
+          </a:xfrm>
+          <a:prstGeom prst="rect">
+            <a:avLst/>
+          </a:prstGeom>
+          <a:solidFill>
+            <a:srgbClr val="C08A2B"/>
+          </a:solidFill>
+          <a:ln>
+            <a:noFill/>
+          </a:ln>
+          <a:effectLst/>
+        </p:spPr>
+        <p:style>
+          <a:lnRef idx="1">
+            <a:schemeClr val="accent1"/>
+          </a:lnRef>
+          <a:fillRef idx="3">
+            <a:schemeClr val="accent1"/>
+          </a:fillRef>
+          <a:effectRef idx="2">
+            <a:schemeClr val="accent1"/>
+          </a:effectRef>
+          <a:fontRef idx="minor">
+            <a:schemeClr val="lt1"/>
+          </a:fontRef>
+        </p:style>
+        <p:txBody>
+          <a:bodyPr rtlCol="0" anchor="ctr"/>
+          <a:lstStyle/>
+          <a:p>
+            <a:pPr algn="ctr"/>
+          </a:p>
+        </p:txBody>
+      </p:sp>
+      <p:sp>
+        <p:nvSpPr>
+          <p:cNvPr id="34" name="TextBox 33"/>
           <p:cNvSpPr txBox="1"/>
           <p:nvPr/>
         </p:nvSpPr>
@@ -10322,14 +12392,82 @@
       </p:sp>
       <p:sp>
         <p:nvSpPr>
-          <p:cNvPr id="9" name="TextBox 8"/>
+          <p:cNvPr id="9" name="Rectangle 8"/>
+          <p:cNvSpPr/>
+          <p:nvPr/>
+        </p:nvSpPr>
+        <p:spPr>
+          <a:xfrm>
+            <a:off x="1481328" y="1463040"/>
+            <a:ext cx="822960" cy="822960"/>
+          </a:xfrm>
+          <a:prstGeom prst="rect">
+            <a:avLst/>
+          </a:prstGeom>
+          <a:solidFill>
+            <a:srgbClr val="0F2A43"/>
+          </a:solidFill>
+          <a:ln>
+            <a:noFill/>
+          </a:ln>
+          <a:effectLst/>
+        </p:spPr>
+        <p:style>
+          <a:lnRef idx="1">
+            <a:schemeClr val="accent1"/>
+          </a:lnRef>
+          <a:fillRef idx="3">
+            <a:schemeClr val="accent1"/>
+          </a:fillRef>
+          <a:effectRef idx="2">
+            <a:schemeClr val="accent1"/>
+          </a:effectRef>
+          <a:fontRef idx="minor">
+            <a:schemeClr val="lt1"/>
+          </a:fontRef>
+        </p:style>
+        <p:txBody>
+          <a:bodyPr rtlCol="0" anchor="ctr"/>
+          <a:lstStyle/>
+          <a:p>
+            <a:pPr algn="ctr"/>
+          </a:p>
+        </p:txBody>
+      </p:sp>
+      <p:pic>
+        <p:nvPicPr>
+          <p:cNvPr id="10" name="Picture 9" descr="image.png"/>
+          <p:cNvPicPr>
+            <a:picLocks noChangeAspect="1"/>
+          </p:cNvPicPr>
+          <p:nvPr/>
+        </p:nvPicPr>
+        <p:blipFill>
+          <a:blip r:embed="rId3"/>
+          <a:stretch>
+            <a:fillRect/>
+          </a:stretch>
+        </p:blipFill>
+        <p:spPr>
+          <a:xfrm>
+            <a:off x="1591056" y="1572768"/>
+            <a:ext cx="603504" cy="603504"/>
+          </a:xfrm>
+          <a:prstGeom prst="rect">
+            <a:avLst/>
+          </a:prstGeom>
+        </p:spPr>
+      </p:pic>
+      <p:sp>
+        <p:nvSpPr>
+          <p:cNvPr id="11" name="TextBox 10"/>
           <p:cNvSpPr txBox="1"/>
           <p:nvPr/>
         </p:nvSpPr>
         <p:spPr>
           <a:xfrm>
-            <a:off x="1508760" y="1517904"/>
-            <a:ext cx="9966960" cy="731520"/>
+            <a:off x="2487168" y="1517904"/>
+            <a:ext cx="9052560" cy="731520"/>
           </a:xfrm>
           <a:prstGeom prst="rect">
             <a:avLst/>
@@ -10361,14 +12499,14 @@
       </p:sp>
       <p:sp>
         <p:nvSpPr>
-          <p:cNvPr id="10" name="TextBox 9"/>
+          <p:cNvPr id="12" name="TextBox 11"/>
           <p:cNvSpPr txBox="1"/>
           <p:nvPr/>
         </p:nvSpPr>
         <p:spPr>
           <a:xfrm>
-            <a:off x="1508760" y="1883664"/>
-            <a:ext cx="9966960" cy="731520"/>
+            <a:off x="2487168" y="1883664"/>
+            <a:ext cx="9052560" cy="731520"/>
           </a:xfrm>
           <a:prstGeom prst="rect">
             <a:avLst/>
@@ -10400,7 +12538,7 @@
       </p:sp>
       <p:sp>
         <p:nvSpPr>
-          <p:cNvPr id="11" name="Rectangle 10"/>
+          <p:cNvPr id="13" name="Rectangle 12"/>
           <p:cNvSpPr/>
           <p:nvPr/>
         </p:nvSpPr>
@@ -10444,7 +12582,7 @@
       </p:sp>
       <p:sp>
         <p:nvSpPr>
-          <p:cNvPr id="12" name="TextBox 11"/>
+          <p:cNvPr id="14" name="TextBox 13"/>
           <p:cNvSpPr txBox="1"/>
           <p:nvPr/>
         </p:nvSpPr>
@@ -10483,14 +12621,82 @@
       </p:sp>
       <p:sp>
         <p:nvSpPr>
-          <p:cNvPr id="13" name="TextBox 12"/>
+          <p:cNvPr id="15" name="Rectangle 14"/>
+          <p:cNvSpPr/>
+          <p:nvPr/>
+        </p:nvSpPr>
+        <p:spPr>
+          <a:xfrm>
+            <a:off x="1481328" y="2395728"/>
+            <a:ext cx="822960" cy="822960"/>
+          </a:xfrm>
+          <a:prstGeom prst="rect">
+            <a:avLst/>
+          </a:prstGeom>
+          <a:solidFill>
+            <a:srgbClr val="0F2A43"/>
+          </a:solidFill>
+          <a:ln>
+            <a:noFill/>
+          </a:ln>
+          <a:effectLst/>
+        </p:spPr>
+        <p:style>
+          <a:lnRef idx="1">
+            <a:schemeClr val="accent1"/>
+          </a:lnRef>
+          <a:fillRef idx="3">
+            <a:schemeClr val="accent1"/>
+          </a:fillRef>
+          <a:effectRef idx="2">
+            <a:schemeClr val="accent1"/>
+          </a:effectRef>
+          <a:fontRef idx="minor">
+            <a:schemeClr val="lt1"/>
+          </a:fontRef>
+        </p:style>
+        <p:txBody>
+          <a:bodyPr rtlCol="0" anchor="ctr"/>
+          <a:lstStyle/>
+          <a:p>
+            <a:pPr algn="ctr"/>
+          </a:p>
+        </p:txBody>
+      </p:sp>
+      <p:pic>
+        <p:nvPicPr>
+          <p:cNvPr id="16" name="Picture 15" descr="image.png"/>
+          <p:cNvPicPr>
+            <a:picLocks noChangeAspect="1"/>
+          </p:cNvPicPr>
+          <p:nvPr/>
+        </p:nvPicPr>
+        <p:blipFill>
+          <a:blip r:embed="rId2"/>
+          <a:stretch>
+            <a:fillRect/>
+          </a:stretch>
+        </p:blipFill>
+        <p:spPr>
+          <a:xfrm>
+            <a:off x="1591056" y="2505456"/>
+            <a:ext cx="603504" cy="603504"/>
+          </a:xfrm>
+          <a:prstGeom prst="rect">
+            <a:avLst/>
+          </a:prstGeom>
+        </p:spPr>
+      </p:pic>
+      <p:sp>
+        <p:nvSpPr>
+          <p:cNvPr id="17" name="TextBox 16"/>
           <p:cNvSpPr txBox="1"/>
           <p:nvPr/>
         </p:nvSpPr>
         <p:spPr>
           <a:xfrm>
-            <a:off x="1508760" y="2450592"/>
-            <a:ext cx="9966960" cy="731520"/>
+            <a:off x="2487168" y="2450592"/>
+            <a:ext cx="9052560" cy="731520"/>
           </a:xfrm>
           <a:prstGeom prst="rect">
             <a:avLst/>
@@ -10522,14 +12728,14 @@
       </p:sp>
       <p:sp>
         <p:nvSpPr>
-          <p:cNvPr id="14" name="TextBox 13"/>
+          <p:cNvPr id="18" name="TextBox 17"/>
           <p:cNvSpPr txBox="1"/>
           <p:nvPr/>
         </p:nvSpPr>
         <p:spPr>
           <a:xfrm>
-            <a:off x="1508760" y="2816352"/>
-            <a:ext cx="9966960" cy="731520"/>
+            <a:off x="2487168" y="2816352"/>
+            <a:ext cx="9052560" cy="731520"/>
           </a:xfrm>
           <a:prstGeom prst="rect">
             <a:avLst/>
@@ -10561,7 +12767,7 @@
       </p:sp>
       <p:sp>
         <p:nvSpPr>
-          <p:cNvPr id="15" name="Rectangle 14"/>
+          <p:cNvPr id="19" name="Rectangle 18"/>
           <p:cNvSpPr/>
           <p:nvPr/>
         </p:nvSpPr>
@@ -10605,7 +12811,7 @@
       </p:sp>
       <p:sp>
         <p:nvSpPr>
-          <p:cNvPr id="16" name="TextBox 15"/>
+          <p:cNvPr id="20" name="TextBox 19"/>
           <p:cNvSpPr txBox="1"/>
           <p:nvPr/>
         </p:nvSpPr>
@@ -10644,14 +12850,82 @@
       </p:sp>
       <p:sp>
         <p:nvSpPr>
-          <p:cNvPr id="17" name="TextBox 16"/>
+          <p:cNvPr id="21" name="Rectangle 20"/>
+          <p:cNvSpPr/>
+          <p:nvPr/>
+        </p:nvSpPr>
+        <p:spPr>
+          <a:xfrm>
+            <a:off x="1481328" y="3328416"/>
+            <a:ext cx="822960" cy="822960"/>
+          </a:xfrm>
+          <a:prstGeom prst="rect">
+            <a:avLst/>
+          </a:prstGeom>
+          <a:solidFill>
+            <a:srgbClr val="0F2A43"/>
+          </a:solidFill>
+          <a:ln>
+            <a:noFill/>
+          </a:ln>
+          <a:effectLst/>
+        </p:spPr>
+        <p:style>
+          <a:lnRef idx="1">
+            <a:schemeClr val="accent1"/>
+          </a:lnRef>
+          <a:fillRef idx="3">
+            <a:schemeClr val="accent1"/>
+          </a:fillRef>
+          <a:effectRef idx="2">
+            <a:schemeClr val="accent1"/>
+          </a:effectRef>
+          <a:fontRef idx="minor">
+            <a:schemeClr val="lt1"/>
+          </a:fontRef>
+        </p:style>
+        <p:txBody>
+          <a:bodyPr rtlCol="0" anchor="ctr"/>
+          <a:lstStyle/>
+          <a:p>
+            <a:pPr algn="ctr"/>
+          </a:p>
+        </p:txBody>
+      </p:sp>
+      <p:pic>
+        <p:nvPicPr>
+          <p:cNvPr id="22" name="Picture 21" descr="image.png"/>
+          <p:cNvPicPr>
+            <a:picLocks noChangeAspect="1"/>
+          </p:cNvPicPr>
+          <p:nvPr/>
+        </p:nvPicPr>
+        <p:blipFill>
+          <a:blip r:embed="rId4"/>
+          <a:stretch>
+            <a:fillRect/>
+          </a:stretch>
+        </p:blipFill>
+        <p:spPr>
+          <a:xfrm>
+            <a:off x="1591056" y="3438144"/>
+            <a:ext cx="603504" cy="603504"/>
+          </a:xfrm>
+          <a:prstGeom prst="rect">
+            <a:avLst/>
+          </a:prstGeom>
+        </p:spPr>
+      </p:pic>
+      <p:sp>
+        <p:nvSpPr>
+          <p:cNvPr id="23" name="TextBox 22"/>
           <p:cNvSpPr txBox="1"/>
           <p:nvPr/>
         </p:nvSpPr>
         <p:spPr>
           <a:xfrm>
-            <a:off x="1508760" y="3383280"/>
-            <a:ext cx="9966960" cy="731520"/>
+            <a:off x="2487168" y="3383280"/>
+            <a:ext cx="9052560" cy="731520"/>
           </a:xfrm>
           <a:prstGeom prst="rect">
             <a:avLst/>
@@ -10683,14 +12957,14 @@
       </p:sp>
       <p:sp>
         <p:nvSpPr>
-          <p:cNvPr id="18" name="TextBox 17"/>
+          <p:cNvPr id="24" name="TextBox 23"/>
           <p:cNvSpPr txBox="1"/>
           <p:nvPr/>
         </p:nvSpPr>
         <p:spPr>
           <a:xfrm>
-            <a:off x="1508760" y="3749040"/>
-            <a:ext cx="9966960" cy="731520"/>
+            <a:off x="2487168" y="3749040"/>
+            <a:ext cx="9052560" cy="731520"/>
           </a:xfrm>
           <a:prstGeom prst="rect">
             <a:avLst/>
@@ -10722,7 +12996,7 @@
       </p:sp>
       <p:sp>
         <p:nvSpPr>
-          <p:cNvPr id="19" name="Rectangle 18"/>
+          <p:cNvPr id="25" name="Rectangle 24"/>
           <p:cNvSpPr/>
           <p:nvPr/>
         </p:nvSpPr>
@@ -10766,7 +13040,7 @@
       </p:sp>
       <p:sp>
         <p:nvSpPr>
-          <p:cNvPr id="20" name="TextBox 19"/>
+          <p:cNvPr id="26" name="TextBox 25"/>
           <p:cNvSpPr txBox="1"/>
           <p:nvPr/>
         </p:nvSpPr>
@@ -10805,14 +13079,82 @@
       </p:sp>
       <p:sp>
         <p:nvSpPr>
-          <p:cNvPr id="21" name="TextBox 20"/>
+          <p:cNvPr id="27" name="Rectangle 26"/>
+          <p:cNvSpPr/>
+          <p:nvPr/>
+        </p:nvSpPr>
+        <p:spPr>
+          <a:xfrm>
+            <a:off x="1481328" y="4261104"/>
+            <a:ext cx="822960" cy="822960"/>
+          </a:xfrm>
+          <a:prstGeom prst="rect">
+            <a:avLst/>
+          </a:prstGeom>
+          <a:solidFill>
+            <a:srgbClr val="0F2A43"/>
+          </a:solidFill>
+          <a:ln>
+            <a:noFill/>
+          </a:ln>
+          <a:effectLst/>
+        </p:spPr>
+        <p:style>
+          <a:lnRef idx="1">
+            <a:schemeClr val="accent1"/>
+          </a:lnRef>
+          <a:fillRef idx="3">
+            <a:schemeClr val="accent1"/>
+          </a:fillRef>
+          <a:effectRef idx="2">
+            <a:schemeClr val="accent1"/>
+          </a:effectRef>
+          <a:fontRef idx="minor">
+            <a:schemeClr val="lt1"/>
+          </a:fontRef>
+        </p:style>
+        <p:txBody>
+          <a:bodyPr rtlCol="0" anchor="ctr"/>
+          <a:lstStyle/>
+          <a:p>
+            <a:pPr algn="ctr"/>
+          </a:p>
+        </p:txBody>
+      </p:sp>
+      <p:pic>
+        <p:nvPicPr>
+          <p:cNvPr id="28" name="Picture 27" descr="image.png"/>
+          <p:cNvPicPr>
+            <a:picLocks noChangeAspect="1"/>
+          </p:cNvPicPr>
+          <p:nvPr/>
+        </p:nvPicPr>
+        <p:blipFill>
+          <a:blip r:embed="rId5"/>
+          <a:stretch>
+            <a:fillRect/>
+          </a:stretch>
+        </p:blipFill>
+        <p:spPr>
+          <a:xfrm>
+            <a:off x="1591056" y="4370832"/>
+            <a:ext cx="603504" cy="603504"/>
+          </a:xfrm>
+          <a:prstGeom prst="rect">
+            <a:avLst/>
+          </a:prstGeom>
+        </p:spPr>
+      </p:pic>
+      <p:sp>
+        <p:nvSpPr>
+          <p:cNvPr id="29" name="TextBox 28"/>
           <p:cNvSpPr txBox="1"/>
           <p:nvPr/>
         </p:nvSpPr>
         <p:spPr>
           <a:xfrm>
-            <a:off x="1508760" y="4315968"/>
-            <a:ext cx="9966960" cy="731520"/>
+            <a:off x="2487168" y="4315968"/>
+            <a:ext cx="9052560" cy="731520"/>
           </a:xfrm>
           <a:prstGeom prst="rect">
             <a:avLst/>
@@ -10844,14 +13186,14 @@
       </p:sp>
       <p:sp>
         <p:nvSpPr>
-          <p:cNvPr id="22" name="TextBox 21"/>
+          <p:cNvPr id="30" name="TextBox 29"/>
           <p:cNvSpPr txBox="1"/>
           <p:nvPr/>
         </p:nvSpPr>
         <p:spPr>
           <a:xfrm>
-            <a:off x="1508760" y="4681728"/>
-            <a:ext cx="9966960" cy="731520"/>
+            <a:off x="2487168" y="4681728"/>
+            <a:ext cx="9052560" cy="731520"/>
           </a:xfrm>
           <a:prstGeom prst="rect">
             <a:avLst/>
@@ -10883,7 +13225,7 @@
       </p:sp>
       <p:sp>
         <p:nvSpPr>
-          <p:cNvPr id="23" name="Rectangle 22"/>
+          <p:cNvPr id="31" name="Rectangle 30"/>
           <p:cNvSpPr/>
           <p:nvPr/>
         </p:nvSpPr>
@@ -10927,7 +13269,7 @@
       </p:sp>
       <p:sp>
         <p:nvSpPr>
-          <p:cNvPr id="24" name="Rectangle 23"/>
+          <p:cNvPr id="32" name="Rectangle 31"/>
           <p:cNvSpPr/>
           <p:nvPr/>
         </p:nvSpPr>
@@ -10971,7 +13313,7 @@
       </p:sp>
       <p:sp>
         <p:nvSpPr>
-          <p:cNvPr id="25" name="TextBox 24"/>
+          <p:cNvPr id="33" name="TextBox 32"/>
           <p:cNvSpPr txBox="1"/>
           <p:nvPr/>
         </p:nvSpPr>
@@ -11010,7 +13352,7 @@
       </p:sp>
       <p:sp>
         <p:nvSpPr>
-          <p:cNvPr id="26" name="TextBox 25"/>
+          <p:cNvPr id="34" name="TextBox 33"/>
           <p:cNvSpPr txBox="1"/>
           <p:nvPr/>
         </p:nvSpPr>
@@ -11049,7 +13391,7 @@
       </p:sp>
       <p:sp>
         <p:nvSpPr>
-          <p:cNvPr id="27" name="Rectangle 26"/>
+          <p:cNvPr id="35" name="Rectangle 34"/>
           <p:cNvSpPr/>
           <p:nvPr/>
         </p:nvSpPr>
@@ -11093,7 +13435,7 @@
       </p:sp>
       <p:sp>
         <p:nvSpPr>
-          <p:cNvPr id="28" name="TextBox 27"/>
+          <p:cNvPr id="36" name="TextBox 35"/>
           <p:cNvSpPr txBox="1"/>
           <p:nvPr/>
         </p:nvSpPr>
@@ -14770,8 +17112,8 @@
         </p:nvSpPr>
         <p:spPr>
           <a:xfrm>
-            <a:off x="640080" y="1920240"/>
-            <a:ext cx="10881360" cy="4572000"/>
+            <a:off x="640080" y="1828800"/>
+            <a:ext cx="6766560" cy="4572000"/>
           </a:xfrm>
           <a:prstGeom prst="rect">
             <a:avLst/>
@@ -14789,17 +17131,17 @@
                 <a:spcPct val="105000"/>
               </a:lnSpc>
               <a:spcAft>
-                <a:spcPts val="3000"/>
+                <a:spcPts val="1800"/>
               </a:spcAft>
             </a:pPr>
             <a:r>
-              <a:rPr sz="2242">
+              <a:rPr sz="2005">
                 <a:solidFill>
                   <a:srgbClr val="334455"/>
                 </a:solidFill>
                 <a:latin typeface="Times New Roman"/>
               </a:rPr>
-              <a:t>•  Committed in more than one state — or in one state but planned, directed or with effects in another.</a:t>
+              <a:t>•  Committed in more than one state — or planned, directed or felt across borders.</a:t>
             </a:r>
           </a:p>
           <a:p>
@@ -14808,17 +17150,17 @@
                 <a:spcPct val="105000"/>
               </a:lnSpc>
               <a:spcAft>
-                <a:spcPts val="3000"/>
+                <a:spcPts val="1800"/>
               </a:spcAft>
             </a:pPr>
             <a:r>
-              <a:rPr sz="2242">
+              <a:rPr sz="2005">
                 <a:solidFill>
                   <a:srgbClr val="334455"/>
                 </a:solidFill>
                 <a:latin typeface="Times New Roman"/>
               </a:rPr>
-              <a:t>•  Trafficking in persons is a paradigm case: it inherently moves people, money and evidence across borders.</a:t>
+              <a:t>•  Trafficking is the paradigm case: it moves people, money and evidence between countries.</a:t>
             </a:r>
           </a:p>
           <a:p>
@@ -14827,17 +17169,17 @@
                 <a:spcPct val="105000"/>
               </a:lnSpc>
               <a:spcAft>
-                <a:spcPts val="3000"/>
+                <a:spcPts val="1800"/>
               </a:spcAft>
             </a:pPr>
             <a:r>
-              <a:rPr sz="2242">
+              <a:rPr sz="2005">
                 <a:solidFill>
                   <a:srgbClr val="334455"/>
                 </a:solidFill>
                 <a:latin typeface="Times New Roman"/>
               </a:rPr>
-              <a:t>•  Prosecuting it therefore requires more than one country's police, courts and laws to act together.</a:t>
+              <a:t>•  Prosecuting it needs several countries' police, courts and laws to act together.</a:t>
             </a:r>
           </a:p>
           <a:p>
@@ -14846,17 +17188,17 @@
                 <a:spcPct val="105000"/>
               </a:lnSpc>
               <a:spcAft>
-                <a:spcPts val="3000"/>
+                <a:spcPts val="1800"/>
               </a:spcAft>
             </a:pPr>
             <a:r>
-              <a:rPr sz="2242">
+              <a:rPr sz="2005">
                 <a:solidFill>
                   <a:srgbClr val="334455"/>
                 </a:solidFill>
                 <a:latin typeface="Times New Roman"/>
               </a:rPr>
-              <a:t>•  This is exactly where domestic systems, built for domestic crime, come under strain.</a:t>
+              <a:t>•  Domestic systems, built for domestic crime, come under strain.</a:t>
             </a:r>
           </a:p>
         </p:txBody>
@@ -14869,8 +17211,8 @@
         </p:nvSpPr>
         <p:spPr>
           <a:xfrm>
-            <a:off x="0" y="5779008"/>
-            <a:ext cx="12191695" cy="566928"/>
+            <a:off x="7726679" y="1600200"/>
+            <a:ext cx="3913632" cy="3977639"/>
           </a:xfrm>
           <a:prstGeom prst="rect">
             <a:avLst/>
@@ -14913,8 +17255,8 @@
         </p:nvSpPr>
         <p:spPr>
           <a:xfrm>
-            <a:off x="0" y="5779008"/>
-            <a:ext cx="128016" cy="566928"/>
+            <a:off x="7726679" y="1600200"/>
+            <a:ext cx="128016" cy="3977639"/>
           </a:xfrm>
           <a:prstGeom prst="rect">
             <a:avLst/>
@@ -14949,45 +17291,30 @@
           </a:p>
         </p:txBody>
       </p:sp>
-      <p:sp>
-        <p:nvSpPr>
-          <p:cNvPr id="10" name="TextBox 9"/>
-          <p:cNvSpPr txBox="1"/>
-          <p:nvPr/>
-        </p:nvSpPr>
-        <p:spPr>
-          <a:xfrm>
-            <a:off x="566928" y="5916168"/>
-            <a:ext cx="11064240" cy="457200"/>
-          </a:xfrm>
-          <a:prstGeom prst="rect">
-            <a:avLst/>
-          </a:prstGeom>
-          <a:noFill/>
-        </p:spPr>
-        <p:txBody>
-          <a:bodyPr wrap="square">
-            <a:spAutoFit/>
-          </a:bodyPr>
-          <a:lstStyle/>
-          <a:p>
-            <a:pPr algn="l">
-              <a:lnSpc>
-                <a:spcPct val="100000"/>
-              </a:lnSpc>
-            </a:pPr>
-            <a:r>
-              <a:rPr sz="1770" b="0" i="1">
-                <a:solidFill>
-                  <a:srgbClr val="0F2A43"/>
-                </a:solidFill>
-                <a:latin typeface="Times New Roman"/>
-              </a:rPr>
-              <a:t>The question is institutional, not just moral: can sovereign systems coordinate fast enough?</a:t>
-            </a:r>
-          </a:p>
-        </p:txBody>
-      </p:sp>
+      <p:pic>
+        <p:nvPicPr>
+          <p:cNvPr id="10" name="Picture 9" descr="image.png"/>
+          <p:cNvPicPr>
+            <a:picLocks noChangeAspect="1"/>
+          </p:cNvPicPr>
+          <p:nvPr/>
+        </p:nvPicPr>
+        <p:blipFill>
+          <a:blip r:embed="rId3"/>
+          <a:stretch>
+            <a:fillRect/>
+          </a:stretch>
+        </p:blipFill>
+        <p:spPr>
+          <a:xfrm>
+            <a:off x="7987283" y="1828799"/>
+            <a:ext cx="3520440" cy="3520440"/>
+          </a:xfrm>
+          <a:prstGeom prst="rect">
+            <a:avLst/>
+          </a:prstGeom>
+        </p:spPr>
+      </p:pic>
       <p:sp>
         <p:nvSpPr>
           <p:cNvPr id="11" name="Rectangle 10"/>
@@ -14996,8 +17323,52 @@
         </p:nvSpPr>
         <p:spPr>
           <a:xfrm>
-            <a:off x="548640" y="6583680"/>
-            <a:ext cx="411480" cy="32004"/>
+            <a:off x="0" y="5779008"/>
+            <a:ext cx="12191695" cy="566928"/>
+          </a:xfrm>
+          <a:prstGeom prst="rect">
+            <a:avLst/>
+          </a:prstGeom>
+          <a:solidFill>
+            <a:srgbClr val="F2F4F7"/>
+          </a:solidFill>
+          <a:ln>
+            <a:noFill/>
+          </a:ln>
+          <a:effectLst/>
+        </p:spPr>
+        <p:style>
+          <a:lnRef idx="1">
+            <a:schemeClr val="accent1"/>
+          </a:lnRef>
+          <a:fillRef idx="3">
+            <a:schemeClr val="accent1"/>
+          </a:fillRef>
+          <a:effectRef idx="2">
+            <a:schemeClr val="accent1"/>
+          </a:effectRef>
+          <a:fontRef idx="minor">
+            <a:schemeClr val="lt1"/>
+          </a:fontRef>
+        </p:style>
+        <p:txBody>
+          <a:bodyPr rtlCol="0" anchor="ctr"/>
+          <a:lstStyle/>
+          <a:p>
+            <a:pPr algn="ctr"/>
+          </a:p>
+        </p:txBody>
+      </p:sp>
+      <p:sp>
+        <p:nvSpPr>
+          <p:cNvPr id="12" name="Rectangle 11"/>
+          <p:cNvSpPr/>
+          <p:nvPr/>
+        </p:nvSpPr>
+        <p:spPr>
+          <a:xfrm>
+            <a:off x="0" y="5779008"/>
+            <a:ext cx="128016" cy="566928"/>
           </a:xfrm>
           <a:prstGeom prst="rect">
             <a:avLst/>
@@ -15034,7 +17405,90 @@
       </p:sp>
       <p:sp>
         <p:nvSpPr>
-          <p:cNvPr id="12" name="TextBox 11"/>
+          <p:cNvPr id="13" name="TextBox 12"/>
+          <p:cNvSpPr txBox="1"/>
+          <p:nvPr/>
+        </p:nvSpPr>
+        <p:spPr>
+          <a:xfrm>
+            <a:off x="566928" y="5916168"/>
+            <a:ext cx="11064240" cy="457200"/>
+          </a:xfrm>
+          <a:prstGeom prst="rect">
+            <a:avLst/>
+          </a:prstGeom>
+          <a:noFill/>
+        </p:spPr>
+        <p:txBody>
+          <a:bodyPr wrap="square">
+            <a:spAutoFit/>
+          </a:bodyPr>
+          <a:lstStyle/>
+          <a:p>
+            <a:pPr algn="l">
+              <a:lnSpc>
+                <a:spcPct val="100000"/>
+              </a:lnSpc>
+            </a:pPr>
+            <a:r>
+              <a:rPr sz="1770" b="0" i="1">
+                <a:solidFill>
+                  <a:srgbClr val="0F2A43"/>
+                </a:solidFill>
+                <a:latin typeface="Times New Roman"/>
+              </a:rPr>
+              <a:t>The question is institutional, not just moral: can sovereign systems coordinate fast enough?</a:t>
+            </a:r>
+          </a:p>
+        </p:txBody>
+      </p:sp>
+      <p:sp>
+        <p:nvSpPr>
+          <p:cNvPr id="14" name="Rectangle 13"/>
+          <p:cNvSpPr/>
+          <p:nvPr/>
+        </p:nvSpPr>
+        <p:spPr>
+          <a:xfrm>
+            <a:off x="548640" y="6583680"/>
+            <a:ext cx="411480" cy="32004"/>
+          </a:xfrm>
+          <a:prstGeom prst="rect">
+            <a:avLst/>
+          </a:prstGeom>
+          <a:solidFill>
+            <a:srgbClr val="C08A2B"/>
+          </a:solidFill>
+          <a:ln>
+            <a:noFill/>
+          </a:ln>
+          <a:effectLst/>
+        </p:spPr>
+        <p:style>
+          <a:lnRef idx="1">
+            <a:schemeClr val="accent1"/>
+          </a:lnRef>
+          <a:fillRef idx="3">
+            <a:schemeClr val="accent1"/>
+          </a:fillRef>
+          <a:effectRef idx="2">
+            <a:schemeClr val="accent1"/>
+          </a:effectRef>
+          <a:fontRef idx="minor">
+            <a:schemeClr val="lt1"/>
+          </a:fontRef>
+        </p:style>
+        <p:txBody>
+          <a:bodyPr rtlCol="0" anchor="ctr"/>
+          <a:lstStyle/>
+          <a:p>
+            <a:pPr algn="ctr"/>
+          </a:p>
+        </p:txBody>
+      </p:sp>
+      <p:sp>
+        <p:nvSpPr>
+          <p:cNvPr id="15" name="TextBox 14"/>
           <p:cNvSpPr txBox="1"/>
           <p:nvPr/>
         </p:nvSpPr>
@@ -15296,7 +17750,7 @@
         <p:spPr>
           <a:xfrm>
             <a:off x="640080" y="1874519"/>
-            <a:ext cx="10881360" cy="4572000"/>
+            <a:ext cx="6766560" cy="4572000"/>
           </a:xfrm>
           <a:prstGeom prst="rect">
             <a:avLst/>
@@ -15314,26 +17768,17 @@
                 <a:spcPct val="105000"/>
               </a:lnSpc>
               <a:spcAft>
-                <a:spcPts val="2800"/>
+                <a:spcPts val="2000"/>
               </a:spcAft>
             </a:pPr>
             <a:r>
-              <a:rPr sz="2242" b="1">
-                <a:solidFill>
-                  <a:srgbClr val="0F2A43"/>
-                </a:solidFill>
-                <a:latin typeface="Times New Roman"/>
-              </a:rPr>
-              <a:t>•  Full name: </a:t>
-            </a:r>
-            <a:r>
-              <a:rPr sz="2242">
+              <a:rPr sz="2005">
                 <a:solidFill>
                   <a:srgbClr val="334455"/>
                 </a:solidFill>
                 <a:latin typeface="Times New Roman"/>
               </a:rPr>
-              <a:t>UN Protocol to Prevent, Suppress and Punish Trafficking in Persons.</a:t>
+              <a:t>•  The first globally agreed definition of human trafficking (UN, 2000).</a:t>
             </a:r>
           </a:p>
           <a:p>
@@ -15342,17 +17787,17 @@
                 <a:spcPct val="105000"/>
               </a:lnSpc>
               <a:spcAft>
-                <a:spcPts val="2800"/>
+                <a:spcPts val="2000"/>
               </a:spcAft>
             </a:pPr>
             <a:r>
-              <a:rPr sz="2242">
+              <a:rPr sz="2005">
                 <a:solidFill>
                   <a:srgbClr val="334455"/>
                 </a:solidFill>
                 <a:latin typeface="Times New Roman"/>
               </a:rPr>
-              <a:t>•  First globally agreed definition of human trafficking.</a:t>
+              <a:t>•  Built from three elements: act + means + purpose of exploitation.</a:t>
             </a:r>
           </a:p>
           <a:p>
@@ -15361,26 +17806,17 @@
                 <a:spcPct val="105000"/>
               </a:lnSpc>
               <a:spcAft>
-                <a:spcPts val="2800"/>
+                <a:spcPts val="2000"/>
               </a:spcAft>
             </a:pPr>
             <a:r>
-              <a:rPr sz="2242" b="1">
-                <a:solidFill>
-                  <a:srgbClr val="0F2A43"/>
-                </a:solidFill>
-                <a:latin typeface="Times New Roman"/>
-              </a:rPr>
-              <a:t>•  Three elements: </a:t>
-            </a:r>
-            <a:r>
-              <a:rPr sz="2242">
+              <a:rPr sz="2005">
                 <a:solidFill>
                   <a:srgbClr val="334455"/>
                 </a:solidFill>
                 <a:latin typeface="Times New Roman"/>
               </a:rPr>
-              <a:t>the act, the means, and the purpose of exploitation.</a:t>
+              <a:t>•  For children, the "means" element is not required.</a:t>
             </a:r>
           </a:p>
           <a:p>
@@ -15389,36 +17825,17 @@
                 <a:spcPct val="105000"/>
               </a:lnSpc>
               <a:spcAft>
-                <a:spcPts val="2800"/>
+                <a:spcPts val="2000"/>
               </a:spcAft>
             </a:pPr>
             <a:r>
-              <a:rPr sz="2242">
+              <a:rPr sz="2005">
                 <a:solidFill>
                   <a:srgbClr val="334455"/>
                 </a:solidFill>
                 <a:latin typeface="Times New Roman"/>
               </a:rPr>
-              <a:t>•  For children, the "means" element is not required — any recruitment for exploitation qualifies.</a:t>
-            </a:r>
-          </a:p>
-          <a:p>
-            <a:pPr>
-              <a:lnSpc>
-                <a:spcPct val="105000"/>
-              </a:lnSpc>
-              <a:spcAft>
-                <a:spcPts val="2800"/>
-              </a:spcAft>
-            </a:pPr>
-            <a:r>
-              <a:rPr sz="2242">
-                <a:solidFill>
-                  <a:srgbClr val="334455"/>
-                </a:solidFill>
-                <a:latin typeface="Times New Roman"/>
-              </a:rPr>
-              <a:t>•  Obliges states parties to criminalise trafficking in their domestic law.</a:t>
+              <a:t>•  Obliges 190+ states parties to criminalise trafficking at home.</a:t>
             </a:r>
           </a:p>
         </p:txBody>
@@ -15431,8 +17848,8 @@
         </p:nvSpPr>
         <p:spPr>
           <a:xfrm>
-            <a:off x="0" y="5779008"/>
-            <a:ext cx="12191695" cy="566928"/>
+            <a:off x="7726679" y="1600200"/>
+            <a:ext cx="3913632" cy="3977639"/>
           </a:xfrm>
           <a:prstGeom prst="rect">
             <a:avLst/>
@@ -15475,8 +17892,8 @@
         </p:nvSpPr>
         <p:spPr>
           <a:xfrm>
-            <a:off x="0" y="5779008"/>
-            <a:ext cx="128016" cy="566928"/>
+            <a:off x="7726679" y="1600200"/>
+            <a:ext cx="128016" cy="3977639"/>
           </a:xfrm>
           <a:prstGeom prst="rect">
             <a:avLst/>
@@ -15511,45 +17928,30 @@
           </a:p>
         </p:txBody>
       </p:sp>
-      <p:sp>
-        <p:nvSpPr>
-          <p:cNvPr id="10" name="TextBox 9"/>
-          <p:cNvSpPr txBox="1"/>
-          <p:nvPr/>
-        </p:nvSpPr>
-        <p:spPr>
-          <a:xfrm>
-            <a:off x="566928" y="5916168"/>
-            <a:ext cx="11064240" cy="457200"/>
-          </a:xfrm>
-          <a:prstGeom prst="rect">
-            <a:avLst/>
-          </a:prstGeom>
-          <a:noFill/>
-        </p:spPr>
-        <p:txBody>
-          <a:bodyPr wrap="square">
-            <a:spAutoFit/>
-          </a:bodyPr>
-          <a:lstStyle/>
-          <a:p>
-            <a:pPr algn="l">
-              <a:lnSpc>
-                <a:spcPct val="100000"/>
-              </a:lnSpc>
-            </a:pPr>
-            <a:r>
-              <a:rPr sz="1770" b="0" i="1">
-                <a:solidFill>
-                  <a:srgbClr val="0F2A43"/>
-                </a:solidFill>
-                <a:latin typeface="Times New Roman"/>
-              </a:rPr>
-              <a:t>It gives 190+ states a shared vocabulary — a precondition for cooperation.</a:t>
-            </a:r>
-          </a:p>
-        </p:txBody>
-      </p:sp>
+      <p:pic>
+        <p:nvPicPr>
+          <p:cNvPr id="10" name="Picture 9" descr="image.png"/>
+          <p:cNvPicPr>
+            <a:picLocks noChangeAspect="1"/>
+          </p:cNvPicPr>
+          <p:nvPr/>
+        </p:nvPicPr>
+        <p:blipFill>
+          <a:blip r:embed="rId3"/>
+          <a:stretch>
+            <a:fillRect/>
+          </a:stretch>
+        </p:blipFill>
+        <p:spPr>
+          <a:xfrm>
+            <a:off x="7987283" y="1828799"/>
+            <a:ext cx="3520440" cy="3520440"/>
+          </a:xfrm>
+          <a:prstGeom prst="rect">
+            <a:avLst/>
+          </a:prstGeom>
+        </p:spPr>
+      </p:pic>
       <p:sp>
         <p:nvSpPr>
           <p:cNvPr id="11" name="Rectangle 10"/>
@@ -15558,8 +17960,52 @@
         </p:nvSpPr>
         <p:spPr>
           <a:xfrm>
-            <a:off x="548640" y="6583680"/>
-            <a:ext cx="411480" cy="32004"/>
+            <a:off x="0" y="5779008"/>
+            <a:ext cx="12191695" cy="566928"/>
+          </a:xfrm>
+          <a:prstGeom prst="rect">
+            <a:avLst/>
+          </a:prstGeom>
+          <a:solidFill>
+            <a:srgbClr val="F2F4F7"/>
+          </a:solidFill>
+          <a:ln>
+            <a:noFill/>
+          </a:ln>
+          <a:effectLst/>
+        </p:spPr>
+        <p:style>
+          <a:lnRef idx="1">
+            <a:schemeClr val="accent1"/>
+          </a:lnRef>
+          <a:fillRef idx="3">
+            <a:schemeClr val="accent1"/>
+          </a:fillRef>
+          <a:effectRef idx="2">
+            <a:schemeClr val="accent1"/>
+          </a:effectRef>
+          <a:fontRef idx="minor">
+            <a:schemeClr val="lt1"/>
+          </a:fontRef>
+        </p:style>
+        <p:txBody>
+          <a:bodyPr rtlCol="0" anchor="ctr"/>
+          <a:lstStyle/>
+          <a:p>
+            <a:pPr algn="ctr"/>
+          </a:p>
+        </p:txBody>
+      </p:sp>
+      <p:sp>
+        <p:nvSpPr>
+          <p:cNvPr id="12" name="Rectangle 11"/>
+          <p:cNvSpPr/>
+          <p:nvPr/>
+        </p:nvSpPr>
+        <p:spPr>
+          <a:xfrm>
+            <a:off x="0" y="5779008"/>
+            <a:ext cx="128016" cy="566928"/>
           </a:xfrm>
           <a:prstGeom prst="rect">
             <a:avLst/>
@@ -15596,7 +18042,90 @@
       </p:sp>
       <p:sp>
         <p:nvSpPr>
-          <p:cNvPr id="12" name="TextBox 11"/>
+          <p:cNvPr id="13" name="TextBox 12"/>
+          <p:cNvSpPr txBox="1"/>
+          <p:nvPr/>
+        </p:nvSpPr>
+        <p:spPr>
+          <a:xfrm>
+            <a:off x="566928" y="5916168"/>
+            <a:ext cx="11064240" cy="457200"/>
+          </a:xfrm>
+          <a:prstGeom prst="rect">
+            <a:avLst/>
+          </a:prstGeom>
+          <a:noFill/>
+        </p:spPr>
+        <p:txBody>
+          <a:bodyPr wrap="square">
+            <a:spAutoFit/>
+          </a:bodyPr>
+          <a:lstStyle/>
+          <a:p>
+            <a:pPr algn="l">
+              <a:lnSpc>
+                <a:spcPct val="100000"/>
+              </a:lnSpc>
+            </a:pPr>
+            <a:r>
+              <a:rPr sz="1770" b="0" i="1">
+                <a:solidFill>
+                  <a:srgbClr val="0F2A43"/>
+                </a:solidFill>
+                <a:latin typeface="Times New Roman"/>
+              </a:rPr>
+              <a:t>It gives 190+ states a shared vocabulary — a precondition for cooperation.</a:t>
+            </a:r>
+          </a:p>
+        </p:txBody>
+      </p:sp>
+      <p:sp>
+        <p:nvSpPr>
+          <p:cNvPr id="14" name="Rectangle 13"/>
+          <p:cNvSpPr/>
+          <p:nvPr/>
+        </p:nvSpPr>
+        <p:spPr>
+          <a:xfrm>
+            <a:off x="548640" y="6583680"/>
+            <a:ext cx="411480" cy="32004"/>
+          </a:xfrm>
+          <a:prstGeom prst="rect">
+            <a:avLst/>
+          </a:prstGeom>
+          <a:solidFill>
+            <a:srgbClr val="C08A2B"/>
+          </a:solidFill>
+          <a:ln>
+            <a:noFill/>
+          </a:ln>
+          <a:effectLst/>
+        </p:spPr>
+        <p:style>
+          <a:lnRef idx="1">
+            <a:schemeClr val="accent1"/>
+          </a:lnRef>
+          <a:fillRef idx="3">
+            <a:schemeClr val="accent1"/>
+          </a:fillRef>
+          <a:effectRef idx="2">
+            <a:schemeClr val="accent1"/>
+          </a:effectRef>
+          <a:fontRef idx="minor">
+            <a:schemeClr val="lt1"/>
+          </a:fontRef>
+        </p:style>
+        <p:txBody>
+          <a:bodyPr rtlCol="0" anchor="ctr"/>
+          <a:lstStyle/>
+          <a:p>
+            <a:pPr algn="ctr"/>
+          </a:p>
+        </p:txBody>
+      </p:sp>
+      <p:sp>
+        <p:nvSpPr>
+          <p:cNvPr id="15" name="TextBox 14"/>
           <p:cNvSpPr txBox="1"/>
           <p:nvPr/>
         </p:nvSpPr>
